--- a/Decay Kinetics.pptx
+++ b/Decay Kinetics.pptx
@@ -215,7 +215,7 @@
           <a:p>
             <a:fld id="{05D1512D-31BA-4C40-9BFB-70FC430AAA82}" type="datetimeFigureOut">
               <a:rPr lang="en-AU" smtClean="0"/>
-              <a:t>17/09/2026</a:t>
+              <a:t>21/09/2026</a:t>
             </a:fld>
             <a:endParaRPr lang="en-AU"/>
           </a:p>
@@ -956,7 +956,7 @@
           <a:p>
             <a:fld id="{6BDB691C-6365-487C-9B0B-C92D3508E265}" type="datetimeFigureOut">
               <a:rPr lang="en-AU" smtClean="0"/>
-              <a:t>17/09/2026</a:t>
+              <a:t>21/09/2026</a:t>
             </a:fld>
             <a:endParaRPr lang="en-AU"/>
           </a:p>
@@ -1156,7 +1156,7 @@
           <a:p>
             <a:fld id="{6BDB691C-6365-487C-9B0B-C92D3508E265}" type="datetimeFigureOut">
               <a:rPr lang="en-AU" smtClean="0"/>
-              <a:t>17/09/2026</a:t>
+              <a:t>21/09/2026</a:t>
             </a:fld>
             <a:endParaRPr lang="en-AU"/>
           </a:p>
@@ -1366,7 +1366,7 @@
           <a:p>
             <a:fld id="{6BDB691C-6365-487C-9B0B-C92D3508E265}" type="datetimeFigureOut">
               <a:rPr lang="en-AU" smtClean="0"/>
-              <a:t>17/09/2026</a:t>
+              <a:t>21/09/2026</a:t>
             </a:fld>
             <a:endParaRPr lang="en-AU"/>
           </a:p>
@@ -1566,7 +1566,7 @@
           <a:p>
             <a:fld id="{6BDB691C-6365-487C-9B0B-C92D3508E265}" type="datetimeFigureOut">
               <a:rPr lang="en-AU" smtClean="0"/>
-              <a:t>17/09/2026</a:t>
+              <a:t>21/09/2026</a:t>
             </a:fld>
             <a:endParaRPr lang="en-AU"/>
           </a:p>
@@ -1842,7 +1842,7 @@
           <a:p>
             <a:fld id="{6BDB691C-6365-487C-9B0B-C92D3508E265}" type="datetimeFigureOut">
               <a:rPr lang="en-AU" smtClean="0"/>
-              <a:t>17/09/2026</a:t>
+              <a:t>21/09/2026</a:t>
             </a:fld>
             <a:endParaRPr lang="en-AU"/>
           </a:p>
@@ -2110,7 +2110,7 @@
           <a:p>
             <a:fld id="{6BDB691C-6365-487C-9B0B-C92D3508E265}" type="datetimeFigureOut">
               <a:rPr lang="en-AU" smtClean="0"/>
-              <a:t>17/09/2026</a:t>
+              <a:t>21/09/2026</a:t>
             </a:fld>
             <a:endParaRPr lang="en-AU"/>
           </a:p>
@@ -2525,7 +2525,7 @@
           <a:p>
             <a:fld id="{6BDB691C-6365-487C-9B0B-C92D3508E265}" type="datetimeFigureOut">
               <a:rPr lang="en-AU" smtClean="0"/>
-              <a:t>17/09/2026</a:t>
+              <a:t>21/09/2026</a:t>
             </a:fld>
             <a:endParaRPr lang="en-AU"/>
           </a:p>
@@ -2667,7 +2667,7 @@
           <a:p>
             <a:fld id="{6BDB691C-6365-487C-9B0B-C92D3508E265}" type="datetimeFigureOut">
               <a:rPr lang="en-AU" smtClean="0"/>
-              <a:t>17/09/2026</a:t>
+              <a:t>21/09/2026</a:t>
             </a:fld>
             <a:endParaRPr lang="en-AU"/>
           </a:p>
@@ -2780,7 +2780,7 @@
           <a:p>
             <a:fld id="{6BDB691C-6365-487C-9B0B-C92D3508E265}" type="datetimeFigureOut">
               <a:rPr lang="en-AU" smtClean="0"/>
-              <a:t>17/09/2026</a:t>
+              <a:t>21/09/2026</a:t>
             </a:fld>
             <a:endParaRPr lang="en-AU"/>
           </a:p>
@@ -3093,7 +3093,7 @@
           <a:p>
             <a:fld id="{6BDB691C-6365-487C-9B0B-C92D3508E265}" type="datetimeFigureOut">
               <a:rPr lang="en-AU" smtClean="0"/>
-              <a:t>17/09/2026</a:t>
+              <a:t>21/09/2026</a:t>
             </a:fld>
             <a:endParaRPr lang="en-AU"/>
           </a:p>
@@ -3382,7 +3382,7 @@
           <a:p>
             <a:fld id="{6BDB691C-6365-487C-9B0B-C92D3508E265}" type="datetimeFigureOut">
               <a:rPr lang="en-AU" smtClean="0"/>
-              <a:t>17/09/2026</a:t>
+              <a:t>21/09/2026</a:t>
             </a:fld>
             <a:endParaRPr lang="en-AU"/>
           </a:p>
@@ -3625,7 +3625,7 @@
           <a:p>
             <a:fld id="{6BDB691C-6365-487C-9B0B-C92D3508E265}" type="datetimeFigureOut">
               <a:rPr lang="en-AU" smtClean="0"/>
-              <a:t>17/09/2026</a:t>
+              <a:t>21/09/2026</a:t>
             </a:fld>
             <a:endParaRPr lang="en-AU"/>
           </a:p>
@@ -4166,6 +4166,126 @@
   <p:clrMapOvr>
     <a:masterClrMapping/>
   </p:clrMapOvr>
+  <p:timing>
+    <p:tnLst>
+      <p:par>
+        <p:cTn id="1" dur="indefinite" restart="never" nodeType="tmRoot">
+          <p:childTnLst>
+            <p:seq concurrent="1" nextAc="seek">
+              <p:cTn id="2" dur="indefinite" nodeType="mainSeq">
+                <p:childTnLst>
+                  <p:par>
+                    <p:cTn id="3" fill="hold">
+                      <p:stCondLst>
+                        <p:cond delay="indefinite"/>
+                      </p:stCondLst>
+                      <p:childTnLst>
+                        <p:par>
+                          <p:cTn id="4" fill="hold">
+                            <p:stCondLst>
+                              <p:cond delay="0"/>
+                            </p:stCondLst>
+                            <p:childTnLst>
+                              <p:par>
+                                <p:cTn id="5" presetID="1" presetClass="entr" presetSubtype="0" fill="hold" nodeType="clickEffect">
+                                  <p:stCondLst>
+                                    <p:cond delay="0"/>
+                                  </p:stCondLst>
+                                  <p:childTnLst>
+                                    <p:set>
+                                      <p:cBhvr>
+                                        <p:cTn id="6" dur="1" fill="hold">
+                                          <p:stCondLst>
+                                            <p:cond delay="0"/>
+                                          </p:stCondLst>
+                                        </p:cTn>
+                                        <p:tgtEl>
+                                          <p:spTgt spid="4"/>
+                                        </p:tgtEl>
+                                        <p:attrNameLst>
+                                          <p:attrName>style.visibility</p:attrName>
+                                        </p:attrNameLst>
+                                      </p:cBhvr>
+                                      <p:to>
+                                        <p:strVal val="visible"/>
+                                      </p:to>
+                                    </p:set>
+                                  </p:childTnLst>
+                                </p:cTn>
+                              </p:par>
+                            </p:childTnLst>
+                          </p:cTn>
+                        </p:par>
+                      </p:childTnLst>
+                    </p:cTn>
+                  </p:par>
+                  <p:par>
+                    <p:cTn id="7" fill="hold">
+                      <p:stCondLst>
+                        <p:cond delay="indefinite"/>
+                      </p:stCondLst>
+                      <p:childTnLst>
+                        <p:par>
+                          <p:cTn id="8" fill="hold">
+                            <p:stCondLst>
+                              <p:cond delay="0"/>
+                            </p:stCondLst>
+                            <p:childTnLst>
+                              <p:par>
+                                <p:cTn id="9" presetID="1" presetClass="entr" presetSubtype="0" fill="hold" nodeType="clickEffect">
+                                  <p:stCondLst>
+                                    <p:cond delay="0"/>
+                                  </p:stCondLst>
+                                  <p:childTnLst>
+                                    <p:set>
+                                      <p:cBhvr>
+                                        <p:cTn id="10" dur="1" fill="hold">
+                                          <p:stCondLst>
+                                            <p:cond delay="0"/>
+                                          </p:stCondLst>
+                                        </p:cTn>
+                                        <p:tgtEl>
+                                          <p:spTgt spid="8"/>
+                                        </p:tgtEl>
+                                        <p:attrNameLst>
+                                          <p:attrName>style.visibility</p:attrName>
+                                        </p:attrNameLst>
+                                      </p:cBhvr>
+                                      <p:to>
+                                        <p:strVal val="visible"/>
+                                      </p:to>
+                                    </p:set>
+                                  </p:childTnLst>
+                                </p:cTn>
+                              </p:par>
+                            </p:childTnLst>
+                          </p:cTn>
+                        </p:par>
+                      </p:childTnLst>
+                    </p:cTn>
+                  </p:par>
+                </p:childTnLst>
+              </p:cTn>
+              <p:prevCondLst>
+                <p:cond evt="onPrev" delay="0">
+                  <p:tgtEl>
+                    <p:sldTgt/>
+                  </p:tgtEl>
+                </p:cond>
+              </p:prevCondLst>
+              <p:nextCondLst>
+                <p:cond evt="onNext" delay="0">
+                  <p:tgtEl>
+                    <p:sldTgt/>
+                  </p:tgtEl>
+                </p:cond>
+              </p:nextCondLst>
+            </p:seq>
+          </p:childTnLst>
+        </p:cTn>
+      </p:par>
+    </p:tnLst>
+  </p:timing>
 </p:sld>
 </file>
 
@@ -4304,6 +4424,126 @@
   <p:clrMapOvr>
     <a:masterClrMapping/>
   </p:clrMapOvr>
+  <p:timing>
+    <p:tnLst>
+      <p:par>
+        <p:cTn id="1" dur="indefinite" restart="never" nodeType="tmRoot">
+          <p:childTnLst>
+            <p:seq concurrent="1" nextAc="seek">
+              <p:cTn id="2" dur="indefinite" nodeType="mainSeq">
+                <p:childTnLst>
+                  <p:par>
+                    <p:cTn id="3" fill="hold">
+                      <p:stCondLst>
+                        <p:cond delay="indefinite"/>
+                      </p:stCondLst>
+                      <p:childTnLst>
+                        <p:par>
+                          <p:cTn id="4" fill="hold">
+                            <p:stCondLst>
+                              <p:cond delay="0"/>
+                            </p:stCondLst>
+                            <p:childTnLst>
+                              <p:par>
+                                <p:cTn id="5" presetID="1" presetClass="entr" presetSubtype="0" fill="hold" nodeType="clickEffect">
+                                  <p:stCondLst>
+                                    <p:cond delay="0"/>
+                                  </p:stCondLst>
+                                  <p:childTnLst>
+                                    <p:set>
+                                      <p:cBhvr>
+                                        <p:cTn id="6" dur="1" fill="hold">
+                                          <p:stCondLst>
+                                            <p:cond delay="0"/>
+                                          </p:stCondLst>
+                                        </p:cTn>
+                                        <p:tgtEl>
+                                          <p:spTgt spid="5"/>
+                                        </p:tgtEl>
+                                        <p:attrNameLst>
+                                          <p:attrName>style.visibility</p:attrName>
+                                        </p:attrNameLst>
+                                      </p:cBhvr>
+                                      <p:to>
+                                        <p:strVal val="visible"/>
+                                      </p:to>
+                                    </p:set>
+                                  </p:childTnLst>
+                                </p:cTn>
+                              </p:par>
+                            </p:childTnLst>
+                          </p:cTn>
+                        </p:par>
+                      </p:childTnLst>
+                    </p:cTn>
+                  </p:par>
+                  <p:par>
+                    <p:cTn id="7" fill="hold">
+                      <p:stCondLst>
+                        <p:cond delay="indefinite"/>
+                      </p:stCondLst>
+                      <p:childTnLst>
+                        <p:par>
+                          <p:cTn id="8" fill="hold">
+                            <p:stCondLst>
+                              <p:cond delay="0"/>
+                            </p:stCondLst>
+                            <p:childTnLst>
+                              <p:par>
+                                <p:cTn id="9" presetID="1" presetClass="entr" presetSubtype="0" fill="hold" nodeType="clickEffect">
+                                  <p:stCondLst>
+                                    <p:cond delay="0"/>
+                                  </p:stCondLst>
+                                  <p:childTnLst>
+                                    <p:set>
+                                      <p:cBhvr>
+                                        <p:cTn id="10" dur="1" fill="hold">
+                                          <p:stCondLst>
+                                            <p:cond delay="0"/>
+                                          </p:stCondLst>
+                                        </p:cTn>
+                                        <p:tgtEl>
+                                          <p:spTgt spid="7"/>
+                                        </p:tgtEl>
+                                        <p:attrNameLst>
+                                          <p:attrName>style.visibility</p:attrName>
+                                        </p:attrNameLst>
+                                      </p:cBhvr>
+                                      <p:to>
+                                        <p:strVal val="visible"/>
+                                      </p:to>
+                                    </p:set>
+                                  </p:childTnLst>
+                                </p:cTn>
+                              </p:par>
+                            </p:childTnLst>
+                          </p:cTn>
+                        </p:par>
+                      </p:childTnLst>
+                    </p:cTn>
+                  </p:par>
+                </p:childTnLst>
+              </p:cTn>
+              <p:prevCondLst>
+                <p:cond evt="onPrev" delay="0">
+                  <p:tgtEl>
+                    <p:sldTgt/>
+                  </p:tgtEl>
+                </p:cond>
+              </p:prevCondLst>
+              <p:nextCondLst>
+                <p:cond evt="onNext" delay="0">
+                  <p:tgtEl>
+                    <p:sldTgt/>
+                  </p:tgtEl>
+                </p:cond>
+              </p:nextCondLst>
+            </p:seq>
+          </p:childTnLst>
+        </p:cTn>
+      </p:par>
+    </p:tnLst>
+  </p:timing>
 </p:sld>
 </file>
 
@@ -4601,6 +4841,171 @@
   <p:clrMapOvr>
     <a:masterClrMapping/>
   </p:clrMapOvr>
+  <p:timing>
+    <p:tnLst>
+      <p:par>
+        <p:cTn id="1" dur="indefinite" restart="never" nodeType="tmRoot">
+          <p:childTnLst>
+            <p:seq concurrent="1" nextAc="seek">
+              <p:cTn id="2" dur="indefinite" nodeType="mainSeq">
+                <p:childTnLst>
+                  <p:par>
+                    <p:cTn id="3" fill="hold">
+                      <p:stCondLst>
+                        <p:cond delay="indefinite"/>
+                      </p:stCondLst>
+                      <p:childTnLst>
+                        <p:par>
+                          <p:cTn id="4" fill="hold">
+                            <p:stCondLst>
+                              <p:cond delay="0"/>
+                            </p:stCondLst>
+                            <p:childTnLst>
+                              <p:par>
+                                <p:cTn id="5" presetID="1" presetClass="entr" presetSubtype="0" fill="hold" nodeType="clickEffect">
+                                  <p:stCondLst>
+                                    <p:cond delay="0"/>
+                                  </p:stCondLst>
+                                  <p:childTnLst>
+                                    <p:set>
+                                      <p:cBhvr>
+                                        <p:cTn id="6" dur="1" fill="hold">
+                                          <p:stCondLst>
+                                            <p:cond delay="0"/>
+                                          </p:stCondLst>
+                                        </p:cTn>
+                                        <p:tgtEl>
+                                          <p:spTgt spid="69"/>
+                                        </p:tgtEl>
+                                        <p:attrNameLst>
+                                          <p:attrName>style.visibility</p:attrName>
+                                        </p:attrNameLst>
+                                      </p:cBhvr>
+                                      <p:to>
+                                        <p:strVal val="visible"/>
+                                      </p:to>
+                                    </p:set>
+                                  </p:childTnLst>
+                                </p:cTn>
+                              </p:par>
+                            </p:childTnLst>
+                          </p:cTn>
+                        </p:par>
+                      </p:childTnLst>
+                    </p:cTn>
+                  </p:par>
+                  <p:par>
+                    <p:cTn id="7" fill="hold">
+                      <p:stCondLst>
+                        <p:cond delay="indefinite"/>
+                      </p:stCondLst>
+                      <p:childTnLst>
+                        <p:par>
+                          <p:cTn id="8" fill="hold">
+                            <p:stCondLst>
+                              <p:cond delay="0"/>
+                            </p:stCondLst>
+                            <p:childTnLst>
+                              <p:par>
+                                <p:cTn id="9" presetID="1" presetClass="entr" presetSubtype="0" fill="hold" nodeType="clickEffect">
+                                  <p:stCondLst>
+                                    <p:cond delay="0"/>
+                                  </p:stCondLst>
+                                  <p:childTnLst>
+                                    <p:set>
+                                      <p:cBhvr>
+                                        <p:cTn id="10" dur="1" fill="hold">
+                                          <p:stCondLst>
+                                            <p:cond delay="0"/>
+                                          </p:stCondLst>
+                                        </p:cTn>
+                                        <p:tgtEl>
+                                          <p:spTgt spid="70"/>
+                                        </p:tgtEl>
+                                        <p:attrNameLst>
+                                          <p:attrName>style.visibility</p:attrName>
+                                        </p:attrNameLst>
+                                      </p:cBhvr>
+                                      <p:to>
+                                        <p:strVal val="visible"/>
+                                      </p:to>
+                                    </p:set>
+                                  </p:childTnLst>
+                                </p:cTn>
+                              </p:par>
+                            </p:childTnLst>
+                          </p:cTn>
+                        </p:par>
+                      </p:childTnLst>
+                    </p:cTn>
+                  </p:par>
+                  <p:par>
+                    <p:cTn id="11" fill="hold">
+                      <p:stCondLst>
+                        <p:cond delay="indefinite"/>
+                      </p:stCondLst>
+                      <p:childTnLst>
+                        <p:par>
+                          <p:cTn id="12" fill="hold">
+                            <p:stCondLst>
+                              <p:cond delay="0"/>
+                            </p:stCondLst>
+                            <p:childTnLst>
+                              <p:par>
+                                <p:cTn id="13" presetID="1" presetClass="entr" presetSubtype="0" fill="hold" nodeType="clickEffect">
+                                  <p:stCondLst>
+                                    <p:cond delay="0"/>
+                                  </p:stCondLst>
+                                  <p:childTnLst>
+                                    <p:set>
+                                      <p:cBhvr>
+                                        <p:cTn id="14" dur="1" fill="hold">
+                                          <p:stCondLst>
+                                            <p:cond delay="0"/>
+                                          </p:stCondLst>
+                                        </p:cTn>
+                                        <p:tgtEl>
+                                          <p:spTgt spid="71"/>
+                                        </p:tgtEl>
+                                        <p:attrNameLst>
+                                          <p:attrName>style.visibility</p:attrName>
+                                        </p:attrNameLst>
+                                      </p:cBhvr>
+                                      <p:to>
+                                        <p:strVal val="visible"/>
+                                      </p:to>
+                                    </p:set>
+                                  </p:childTnLst>
+                                </p:cTn>
+                              </p:par>
+                            </p:childTnLst>
+                          </p:cTn>
+                        </p:par>
+                      </p:childTnLst>
+                    </p:cTn>
+                  </p:par>
+                </p:childTnLst>
+              </p:cTn>
+              <p:prevCondLst>
+                <p:cond evt="onPrev" delay="0">
+                  <p:tgtEl>
+                    <p:sldTgt/>
+                  </p:tgtEl>
+                </p:cond>
+              </p:prevCondLst>
+              <p:nextCondLst>
+                <p:cond evt="onNext" delay="0">
+                  <p:tgtEl>
+                    <p:sldTgt/>
+                  </p:tgtEl>
+                </p:cond>
+              </p:nextCondLst>
+            </p:seq>
+          </p:childTnLst>
+        </p:cTn>
+      </p:par>
+    </p:tnLst>
+  </p:timing>
 </p:sld>
 </file>
 
@@ -4752,6 +5157,126 @@
   <p:clrMapOvr>
     <a:masterClrMapping/>
   </p:clrMapOvr>
+  <p:timing>
+    <p:tnLst>
+      <p:par>
+        <p:cTn id="1" dur="indefinite" restart="never" nodeType="tmRoot">
+          <p:childTnLst>
+            <p:seq concurrent="1" nextAc="seek">
+              <p:cTn id="2" dur="indefinite" nodeType="mainSeq">
+                <p:childTnLst>
+                  <p:par>
+                    <p:cTn id="3" fill="hold">
+                      <p:stCondLst>
+                        <p:cond delay="indefinite"/>
+                      </p:stCondLst>
+                      <p:childTnLst>
+                        <p:par>
+                          <p:cTn id="4" fill="hold">
+                            <p:stCondLst>
+                              <p:cond delay="0"/>
+                            </p:stCondLst>
+                            <p:childTnLst>
+                              <p:par>
+                                <p:cTn id="5" presetID="1" presetClass="entr" presetSubtype="0" fill="hold" nodeType="clickEffect">
+                                  <p:stCondLst>
+                                    <p:cond delay="0"/>
+                                  </p:stCondLst>
+                                  <p:childTnLst>
+                                    <p:set>
+                                      <p:cBhvr>
+                                        <p:cTn id="6" dur="1" fill="hold">
+                                          <p:stCondLst>
+                                            <p:cond delay="0"/>
+                                          </p:stCondLst>
+                                        </p:cTn>
+                                        <p:tgtEl>
+                                          <p:spTgt spid="4"/>
+                                        </p:tgtEl>
+                                        <p:attrNameLst>
+                                          <p:attrName>style.visibility</p:attrName>
+                                        </p:attrNameLst>
+                                      </p:cBhvr>
+                                      <p:to>
+                                        <p:strVal val="visible"/>
+                                      </p:to>
+                                    </p:set>
+                                  </p:childTnLst>
+                                </p:cTn>
+                              </p:par>
+                            </p:childTnLst>
+                          </p:cTn>
+                        </p:par>
+                      </p:childTnLst>
+                    </p:cTn>
+                  </p:par>
+                  <p:par>
+                    <p:cTn id="7" fill="hold">
+                      <p:stCondLst>
+                        <p:cond delay="indefinite"/>
+                      </p:stCondLst>
+                      <p:childTnLst>
+                        <p:par>
+                          <p:cTn id="8" fill="hold">
+                            <p:stCondLst>
+                              <p:cond delay="0"/>
+                            </p:stCondLst>
+                            <p:childTnLst>
+                              <p:par>
+                                <p:cTn id="9" presetID="1" presetClass="entr" presetSubtype="0" fill="hold" nodeType="clickEffect">
+                                  <p:stCondLst>
+                                    <p:cond delay="0"/>
+                                  </p:stCondLst>
+                                  <p:childTnLst>
+                                    <p:set>
+                                      <p:cBhvr>
+                                        <p:cTn id="10" dur="1" fill="hold">
+                                          <p:stCondLst>
+                                            <p:cond delay="0"/>
+                                          </p:stCondLst>
+                                        </p:cTn>
+                                        <p:tgtEl>
+                                          <p:spTgt spid="8"/>
+                                        </p:tgtEl>
+                                        <p:attrNameLst>
+                                          <p:attrName>style.visibility</p:attrName>
+                                        </p:attrNameLst>
+                                      </p:cBhvr>
+                                      <p:to>
+                                        <p:strVal val="visible"/>
+                                      </p:to>
+                                    </p:set>
+                                  </p:childTnLst>
+                                </p:cTn>
+                              </p:par>
+                            </p:childTnLst>
+                          </p:cTn>
+                        </p:par>
+                      </p:childTnLst>
+                    </p:cTn>
+                  </p:par>
+                </p:childTnLst>
+              </p:cTn>
+              <p:prevCondLst>
+                <p:cond evt="onPrev" delay="0">
+                  <p:tgtEl>
+                    <p:sldTgt/>
+                  </p:tgtEl>
+                </p:cond>
+              </p:prevCondLst>
+              <p:nextCondLst>
+                <p:cond evt="onNext" delay="0">
+                  <p:tgtEl>
+                    <p:sldTgt/>
+                  </p:tgtEl>
+                </p:cond>
+              </p:nextCondLst>
+            </p:seq>
+          </p:childTnLst>
+        </p:cTn>
+      </p:par>
+    </p:tnLst>
+  </p:timing>
 </p:sld>
 </file>
 
@@ -4986,6 +5511,252 @@
   <p:clrMapOvr>
     <a:masterClrMapping/>
   </p:clrMapOvr>
+  <p:timing>
+    <p:tnLst>
+      <p:par>
+        <p:cTn id="1" dur="indefinite" restart="never" nodeType="tmRoot">
+          <p:childTnLst>
+            <p:seq concurrent="1" nextAc="seek">
+              <p:cTn id="2" dur="indefinite" nodeType="mainSeq">
+                <p:childTnLst>
+                  <p:par>
+                    <p:cTn id="3" fill="hold">
+                      <p:stCondLst>
+                        <p:cond delay="indefinite"/>
+                      </p:stCondLst>
+                      <p:childTnLst>
+                        <p:par>
+                          <p:cTn id="4" fill="hold">
+                            <p:stCondLst>
+                              <p:cond delay="0"/>
+                            </p:stCondLst>
+                            <p:childTnLst>
+                              <p:par>
+                                <p:cTn id="5" presetID="1" presetClass="entr" presetSubtype="0" fill="hold" nodeType="clickEffect">
+                                  <p:stCondLst>
+                                    <p:cond delay="0"/>
+                                  </p:stCondLst>
+                                  <p:childTnLst>
+                                    <p:set>
+                                      <p:cBhvr>
+                                        <p:cTn id="6" dur="1" fill="hold">
+                                          <p:stCondLst>
+                                            <p:cond delay="0"/>
+                                          </p:stCondLst>
+                                        </p:cTn>
+                                        <p:tgtEl>
+                                          <p:spTgt spid="57"/>
+                                        </p:tgtEl>
+                                        <p:attrNameLst>
+                                          <p:attrName>style.visibility</p:attrName>
+                                        </p:attrNameLst>
+                                      </p:cBhvr>
+                                      <p:to>
+                                        <p:strVal val="visible"/>
+                                      </p:to>
+                                    </p:set>
+                                  </p:childTnLst>
+                                </p:cTn>
+                              </p:par>
+                              <p:par>
+                                <p:cTn id="7" presetID="1" presetClass="entr" presetSubtype="0" fill="hold" nodeType="withEffect">
+                                  <p:stCondLst>
+                                    <p:cond delay="0"/>
+                                  </p:stCondLst>
+                                  <p:childTnLst>
+                                    <p:set>
+                                      <p:cBhvr>
+                                        <p:cTn id="8" dur="1" fill="hold">
+                                          <p:stCondLst>
+                                            <p:cond delay="0"/>
+                                          </p:stCondLst>
+                                        </p:cTn>
+                                        <p:tgtEl>
+                                          <p:spTgt spid="3"/>
+                                        </p:tgtEl>
+                                        <p:attrNameLst>
+                                          <p:attrName>style.visibility</p:attrName>
+                                        </p:attrNameLst>
+                                      </p:cBhvr>
+                                      <p:to>
+                                        <p:strVal val="visible"/>
+                                      </p:to>
+                                    </p:set>
+                                  </p:childTnLst>
+                                </p:cTn>
+                              </p:par>
+                            </p:childTnLst>
+                          </p:cTn>
+                        </p:par>
+                      </p:childTnLst>
+                    </p:cTn>
+                  </p:par>
+                  <p:par>
+                    <p:cTn id="9" fill="hold">
+                      <p:stCondLst>
+                        <p:cond delay="indefinite"/>
+                      </p:stCondLst>
+                      <p:childTnLst>
+                        <p:par>
+                          <p:cTn id="10" fill="hold">
+                            <p:stCondLst>
+                              <p:cond delay="0"/>
+                            </p:stCondLst>
+                            <p:childTnLst>
+                              <p:par>
+                                <p:cTn id="11" presetID="1" presetClass="entr" presetSubtype="0" fill="hold" nodeType="clickEffect">
+                                  <p:stCondLst>
+                                    <p:cond delay="0"/>
+                                  </p:stCondLst>
+                                  <p:childTnLst>
+                                    <p:set>
+                                      <p:cBhvr>
+                                        <p:cTn id="12" dur="1" fill="hold">
+                                          <p:stCondLst>
+                                            <p:cond delay="0"/>
+                                          </p:stCondLst>
+                                        </p:cTn>
+                                        <p:tgtEl>
+                                          <p:spTgt spid="46"/>
+                                        </p:tgtEl>
+                                        <p:attrNameLst>
+                                          <p:attrName>style.visibility</p:attrName>
+                                        </p:attrNameLst>
+                                      </p:cBhvr>
+                                      <p:to>
+                                        <p:strVal val="visible"/>
+                                      </p:to>
+                                    </p:set>
+                                  </p:childTnLst>
+                                </p:cTn>
+                              </p:par>
+                              <p:par>
+                                <p:cTn id="13" presetID="1" presetClass="entr" presetSubtype="0" fill="hold" nodeType="withEffect">
+                                  <p:stCondLst>
+                                    <p:cond delay="0"/>
+                                  </p:stCondLst>
+                                  <p:childTnLst>
+                                    <p:set>
+                                      <p:cBhvr>
+                                        <p:cTn id="14" dur="1" fill="hold">
+                                          <p:stCondLst>
+                                            <p:cond delay="0"/>
+                                          </p:stCondLst>
+                                        </p:cTn>
+                                        <p:tgtEl>
+                                          <p:spTgt spid="68"/>
+                                        </p:tgtEl>
+                                        <p:attrNameLst>
+                                          <p:attrName>style.visibility</p:attrName>
+                                        </p:attrNameLst>
+                                      </p:cBhvr>
+                                      <p:to>
+                                        <p:strVal val="visible"/>
+                                      </p:to>
+                                    </p:set>
+                                  </p:childTnLst>
+                                </p:cTn>
+                              </p:par>
+                            </p:childTnLst>
+                          </p:cTn>
+                        </p:par>
+                      </p:childTnLst>
+                    </p:cTn>
+                  </p:par>
+                  <p:par>
+                    <p:cTn id="15" fill="hold">
+                      <p:stCondLst>
+                        <p:cond delay="indefinite"/>
+                      </p:stCondLst>
+                      <p:childTnLst>
+                        <p:par>
+                          <p:cTn id="16" fill="hold">
+                            <p:stCondLst>
+                              <p:cond delay="0"/>
+                            </p:stCondLst>
+                            <p:childTnLst>
+                              <p:par>
+                                <p:cTn id="17" presetID="1" presetClass="entr" presetSubtype="0" fill="hold" nodeType="clickEffect">
+                                  <p:stCondLst>
+                                    <p:cond delay="0"/>
+                                  </p:stCondLst>
+                                  <p:childTnLst>
+                                    <p:set>
+                                      <p:cBhvr>
+                                        <p:cTn id="18" dur="1" fill="hold">
+                                          <p:stCondLst>
+                                            <p:cond delay="0"/>
+                                          </p:stCondLst>
+                                        </p:cTn>
+                                        <p:tgtEl>
+                                          <p:spTgt spid="49"/>
+                                        </p:tgtEl>
+                                        <p:attrNameLst>
+                                          <p:attrName>style.visibility</p:attrName>
+                                        </p:attrNameLst>
+                                      </p:cBhvr>
+                                      <p:to>
+                                        <p:strVal val="visible"/>
+                                      </p:to>
+                                    </p:set>
+                                  </p:childTnLst>
+                                </p:cTn>
+                              </p:par>
+                              <p:par>
+                                <p:cTn id="19" presetID="1" presetClass="entr" presetSubtype="0" fill="hold" nodeType="withEffect">
+                                  <p:stCondLst>
+                                    <p:cond delay="0"/>
+                                  </p:stCondLst>
+                                  <p:childTnLst>
+                                    <p:set>
+                                      <p:cBhvr>
+                                        <p:cTn id="20" dur="1" fill="hold">
+                                          <p:stCondLst>
+                                            <p:cond delay="0"/>
+                                          </p:stCondLst>
+                                        </p:cTn>
+                                        <p:tgtEl>
+                                          <p:spTgt spid="53"/>
+                                        </p:tgtEl>
+                                        <p:attrNameLst>
+                                          <p:attrName>style.visibility</p:attrName>
+                                        </p:attrNameLst>
+                                      </p:cBhvr>
+                                      <p:to>
+                                        <p:strVal val="visible"/>
+                                      </p:to>
+                                    </p:set>
+                                  </p:childTnLst>
+                                </p:cTn>
+                              </p:par>
+                            </p:childTnLst>
+                          </p:cTn>
+                        </p:par>
+                      </p:childTnLst>
+                    </p:cTn>
+                  </p:par>
+                </p:childTnLst>
+              </p:cTn>
+              <p:prevCondLst>
+                <p:cond evt="onPrev" delay="0">
+                  <p:tgtEl>
+                    <p:sldTgt/>
+                  </p:tgtEl>
+                </p:cond>
+              </p:prevCondLst>
+              <p:nextCondLst>
+                <p:cond evt="onNext" delay="0">
+                  <p:tgtEl>
+                    <p:sldTgt/>
+                  </p:tgtEl>
+                </p:cond>
+              </p:nextCondLst>
+            </p:seq>
+          </p:childTnLst>
+        </p:cTn>
+      </p:par>
+    </p:tnLst>
+  </p:timing>
 </p:sld>
 </file>
 
@@ -5137,6 +5908,126 @@
   <p:clrMapOvr>
     <a:masterClrMapping/>
   </p:clrMapOvr>
+  <p:timing>
+    <p:tnLst>
+      <p:par>
+        <p:cTn id="1" dur="indefinite" restart="never" nodeType="tmRoot">
+          <p:childTnLst>
+            <p:seq concurrent="1" nextAc="seek">
+              <p:cTn id="2" dur="indefinite" nodeType="mainSeq">
+                <p:childTnLst>
+                  <p:par>
+                    <p:cTn id="3" fill="hold">
+                      <p:stCondLst>
+                        <p:cond delay="indefinite"/>
+                      </p:stCondLst>
+                      <p:childTnLst>
+                        <p:par>
+                          <p:cTn id="4" fill="hold">
+                            <p:stCondLst>
+                              <p:cond delay="0"/>
+                            </p:stCondLst>
+                            <p:childTnLst>
+                              <p:par>
+                                <p:cTn id="5" presetID="1" presetClass="entr" presetSubtype="0" fill="hold" nodeType="clickEffect">
+                                  <p:stCondLst>
+                                    <p:cond delay="0"/>
+                                  </p:stCondLst>
+                                  <p:childTnLst>
+                                    <p:set>
+                                      <p:cBhvr>
+                                        <p:cTn id="6" dur="1" fill="hold">
+                                          <p:stCondLst>
+                                            <p:cond delay="0"/>
+                                          </p:stCondLst>
+                                        </p:cTn>
+                                        <p:tgtEl>
+                                          <p:spTgt spid="5"/>
+                                        </p:tgtEl>
+                                        <p:attrNameLst>
+                                          <p:attrName>style.visibility</p:attrName>
+                                        </p:attrNameLst>
+                                      </p:cBhvr>
+                                      <p:to>
+                                        <p:strVal val="visible"/>
+                                      </p:to>
+                                    </p:set>
+                                  </p:childTnLst>
+                                </p:cTn>
+                              </p:par>
+                            </p:childTnLst>
+                          </p:cTn>
+                        </p:par>
+                      </p:childTnLst>
+                    </p:cTn>
+                  </p:par>
+                  <p:par>
+                    <p:cTn id="7" fill="hold">
+                      <p:stCondLst>
+                        <p:cond delay="indefinite"/>
+                      </p:stCondLst>
+                      <p:childTnLst>
+                        <p:par>
+                          <p:cTn id="8" fill="hold">
+                            <p:stCondLst>
+                              <p:cond delay="0"/>
+                            </p:stCondLst>
+                            <p:childTnLst>
+                              <p:par>
+                                <p:cTn id="9" presetID="1" presetClass="entr" presetSubtype="0" fill="hold" nodeType="clickEffect">
+                                  <p:stCondLst>
+                                    <p:cond delay="0"/>
+                                  </p:stCondLst>
+                                  <p:childTnLst>
+                                    <p:set>
+                                      <p:cBhvr>
+                                        <p:cTn id="10" dur="1" fill="hold">
+                                          <p:stCondLst>
+                                            <p:cond delay="0"/>
+                                          </p:stCondLst>
+                                        </p:cTn>
+                                        <p:tgtEl>
+                                          <p:spTgt spid="7"/>
+                                        </p:tgtEl>
+                                        <p:attrNameLst>
+                                          <p:attrName>style.visibility</p:attrName>
+                                        </p:attrNameLst>
+                                      </p:cBhvr>
+                                      <p:to>
+                                        <p:strVal val="visible"/>
+                                      </p:to>
+                                    </p:set>
+                                  </p:childTnLst>
+                                </p:cTn>
+                              </p:par>
+                            </p:childTnLst>
+                          </p:cTn>
+                        </p:par>
+                      </p:childTnLst>
+                    </p:cTn>
+                  </p:par>
+                </p:childTnLst>
+              </p:cTn>
+              <p:prevCondLst>
+                <p:cond evt="onPrev" delay="0">
+                  <p:tgtEl>
+                    <p:sldTgt/>
+                  </p:tgtEl>
+                </p:cond>
+              </p:prevCondLst>
+              <p:nextCondLst>
+                <p:cond evt="onNext" delay="0">
+                  <p:tgtEl>
+                    <p:sldTgt/>
+                  </p:tgtEl>
+                </p:cond>
+              </p:nextCondLst>
+            </p:seq>
+          </p:childTnLst>
+        </p:cTn>
+      </p:par>
+    </p:tnLst>
+  </p:timing>
 </p:sld>
 </file>
 
@@ -5371,6 +6262,252 @@
   <p:clrMapOvr>
     <a:masterClrMapping/>
   </p:clrMapOvr>
+  <p:timing>
+    <p:tnLst>
+      <p:par>
+        <p:cTn id="1" dur="indefinite" restart="never" nodeType="tmRoot">
+          <p:childTnLst>
+            <p:seq concurrent="1" nextAc="seek">
+              <p:cTn id="2" dur="indefinite" nodeType="mainSeq">
+                <p:childTnLst>
+                  <p:par>
+                    <p:cTn id="3" fill="hold">
+                      <p:stCondLst>
+                        <p:cond delay="indefinite"/>
+                      </p:stCondLst>
+                      <p:childTnLst>
+                        <p:par>
+                          <p:cTn id="4" fill="hold">
+                            <p:stCondLst>
+                              <p:cond delay="0"/>
+                            </p:stCondLst>
+                            <p:childTnLst>
+                              <p:par>
+                                <p:cTn id="5" presetID="1" presetClass="entr" presetSubtype="0" fill="hold" nodeType="clickEffect">
+                                  <p:stCondLst>
+                                    <p:cond delay="0"/>
+                                  </p:stCondLst>
+                                  <p:childTnLst>
+                                    <p:set>
+                                      <p:cBhvr>
+                                        <p:cTn id="6" dur="1" fill="hold">
+                                          <p:stCondLst>
+                                            <p:cond delay="0"/>
+                                          </p:stCondLst>
+                                        </p:cTn>
+                                        <p:tgtEl>
+                                          <p:spTgt spid="28"/>
+                                        </p:tgtEl>
+                                        <p:attrNameLst>
+                                          <p:attrName>style.visibility</p:attrName>
+                                        </p:attrNameLst>
+                                      </p:cBhvr>
+                                      <p:to>
+                                        <p:strVal val="visible"/>
+                                      </p:to>
+                                    </p:set>
+                                  </p:childTnLst>
+                                </p:cTn>
+                              </p:par>
+                              <p:par>
+                                <p:cTn id="7" presetID="1" presetClass="entr" presetSubtype="0" fill="hold" nodeType="withEffect">
+                                  <p:stCondLst>
+                                    <p:cond delay="0"/>
+                                  </p:stCondLst>
+                                  <p:childTnLst>
+                                    <p:set>
+                                      <p:cBhvr>
+                                        <p:cTn id="8" dur="1" fill="hold">
+                                          <p:stCondLst>
+                                            <p:cond delay="0"/>
+                                          </p:stCondLst>
+                                        </p:cTn>
+                                        <p:tgtEl>
+                                          <p:spTgt spid="4"/>
+                                        </p:tgtEl>
+                                        <p:attrNameLst>
+                                          <p:attrName>style.visibility</p:attrName>
+                                        </p:attrNameLst>
+                                      </p:cBhvr>
+                                      <p:to>
+                                        <p:strVal val="visible"/>
+                                      </p:to>
+                                    </p:set>
+                                  </p:childTnLst>
+                                </p:cTn>
+                              </p:par>
+                            </p:childTnLst>
+                          </p:cTn>
+                        </p:par>
+                      </p:childTnLst>
+                    </p:cTn>
+                  </p:par>
+                  <p:par>
+                    <p:cTn id="9" fill="hold">
+                      <p:stCondLst>
+                        <p:cond delay="indefinite"/>
+                      </p:stCondLst>
+                      <p:childTnLst>
+                        <p:par>
+                          <p:cTn id="10" fill="hold">
+                            <p:stCondLst>
+                              <p:cond delay="0"/>
+                            </p:stCondLst>
+                            <p:childTnLst>
+                              <p:par>
+                                <p:cTn id="11" presetID="1" presetClass="entr" presetSubtype="0" fill="hold" nodeType="clickEffect">
+                                  <p:stCondLst>
+                                    <p:cond delay="0"/>
+                                  </p:stCondLst>
+                                  <p:childTnLst>
+                                    <p:set>
+                                      <p:cBhvr>
+                                        <p:cTn id="12" dur="1" fill="hold">
+                                          <p:stCondLst>
+                                            <p:cond delay="0"/>
+                                          </p:stCondLst>
+                                        </p:cTn>
+                                        <p:tgtEl>
+                                          <p:spTgt spid="24"/>
+                                        </p:tgtEl>
+                                        <p:attrNameLst>
+                                          <p:attrName>style.visibility</p:attrName>
+                                        </p:attrNameLst>
+                                      </p:cBhvr>
+                                      <p:to>
+                                        <p:strVal val="visible"/>
+                                      </p:to>
+                                    </p:set>
+                                  </p:childTnLst>
+                                </p:cTn>
+                              </p:par>
+                              <p:par>
+                                <p:cTn id="13" presetID="1" presetClass="entr" presetSubtype="0" fill="hold" nodeType="withEffect">
+                                  <p:stCondLst>
+                                    <p:cond delay="0"/>
+                                  </p:stCondLst>
+                                  <p:childTnLst>
+                                    <p:set>
+                                      <p:cBhvr>
+                                        <p:cTn id="14" dur="1" fill="hold">
+                                          <p:stCondLst>
+                                            <p:cond delay="0"/>
+                                          </p:stCondLst>
+                                        </p:cTn>
+                                        <p:tgtEl>
+                                          <p:spTgt spid="30"/>
+                                        </p:tgtEl>
+                                        <p:attrNameLst>
+                                          <p:attrName>style.visibility</p:attrName>
+                                        </p:attrNameLst>
+                                      </p:cBhvr>
+                                      <p:to>
+                                        <p:strVal val="visible"/>
+                                      </p:to>
+                                    </p:set>
+                                  </p:childTnLst>
+                                </p:cTn>
+                              </p:par>
+                            </p:childTnLst>
+                          </p:cTn>
+                        </p:par>
+                      </p:childTnLst>
+                    </p:cTn>
+                  </p:par>
+                  <p:par>
+                    <p:cTn id="15" fill="hold">
+                      <p:stCondLst>
+                        <p:cond delay="indefinite"/>
+                      </p:stCondLst>
+                      <p:childTnLst>
+                        <p:par>
+                          <p:cTn id="16" fill="hold">
+                            <p:stCondLst>
+                              <p:cond delay="0"/>
+                            </p:stCondLst>
+                            <p:childTnLst>
+                              <p:par>
+                                <p:cTn id="17" presetID="1" presetClass="entr" presetSubtype="0" fill="hold" nodeType="clickEffect">
+                                  <p:stCondLst>
+                                    <p:cond delay="0"/>
+                                  </p:stCondLst>
+                                  <p:childTnLst>
+                                    <p:set>
+                                      <p:cBhvr>
+                                        <p:cTn id="18" dur="1" fill="hold">
+                                          <p:stCondLst>
+                                            <p:cond delay="0"/>
+                                          </p:stCondLst>
+                                        </p:cTn>
+                                        <p:tgtEl>
+                                          <p:spTgt spid="26"/>
+                                        </p:tgtEl>
+                                        <p:attrNameLst>
+                                          <p:attrName>style.visibility</p:attrName>
+                                        </p:attrNameLst>
+                                      </p:cBhvr>
+                                      <p:to>
+                                        <p:strVal val="visible"/>
+                                      </p:to>
+                                    </p:set>
+                                  </p:childTnLst>
+                                </p:cTn>
+                              </p:par>
+                              <p:par>
+                                <p:cTn id="19" presetID="1" presetClass="entr" presetSubtype="0" fill="hold" nodeType="withEffect">
+                                  <p:stCondLst>
+                                    <p:cond delay="0"/>
+                                  </p:stCondLst>
+                                  <p:childTnLst>
+                                    <p:set>
+                                      <p:cBhvr>
+                                        <p:cTn id="20" dur="1" fill="hold">
+                                          <p:stCondLst>
+                                            <p:cond delay="0"/>
+                                          </p:stCondLst>
+                                        </p:cTn>
+                                        <p:tgtEl>
+                                          <p:spTgt spid="53"/>
+                                        </p:tgtEl>
+                                        <p:attrNameLst>
+                                          <p:attrName>style.visibility</p:attrName>
+                                        </p:attrNameLst>
+                                      </p:cBhvr>
+                                      <p:to>
+                                        <p:strVal val="visible"/>
+                                      </p:to>
+                                    </p:set>
+                                  </p:childTnLst>
+                                </p:cTn>
+                              </p:par>
+                            </p:childTnLst>
+                          </p:cTn>
+                        </p:par>
+                      </p:childTnLst>
+                    </p:cTn>
+                  </p:par>
+                </p:childTnLst>
+              </p:cTn>
+              <p:prevCondLst>
+                <p:cond evt="onPrev" delay="0">
+                  <p:tgtEl>
+                    <p:sldTgt/>
+                  </p:tgtEl>
+                </p:cond>
+              </p:prevCondLst>
+              <p:nextCondLst>
+                <p:cond evt="onNext" delay="0">
+                  <p:tgtEl>
+                    <p:sldTgt/>
+                  </p:tgtEl>
+                </p:cond>
+              </p:nextCondLst>
+            </p:seq>
+          </p:childTnLst>
+        </p:cTn>
+      </p:par>
+    </p:tnLst>
+  </p:timing>
 </p:sld>
 </file>
 
@@ -5477,6 +6614,134 @@
   <p:clrMapOvr>
     <a:masterClrMapping/>
   </p:clrMapOvr>
+  <p:timing>
+    <p:tnLst>
+      <p:par>
+        <p:cTn id="1" dur="indefinite" restart="never" nodeType="tmRoot">
+          <p:childTnLst>
+            <p:seq concurrent="1" nextAc="seek">
+              <p:cTn id="2" dur="indefinite" nodeType="mainSeq">
+                <p:childTnLst>
+                  <p:par>
+                    <p:cTn id="3" fill="hold">
+                      <p:stCondLst>
+                        <p:cond delay="indefinite"/>
+                      </p:stCondLst>
+                      <p:childTnLst>
+                        <p:par>
+                          <p:cTn id="4" fill="hold">
+                            <p:stCondLst>
+                              <p:cond delay="0"/>
+                            </p:stCondLst>
+                            <p:childTnLst>
+                              <p:par>
+                                <p:cTn id="5" presetID="1" presetClass="entr" presetSubtype="0" fill="hold" nodeType="clickEffect">
+                                  <p:stCondLst>
+                                    <p:cond delay="0"/>
+                                  </p:stCondLst>
+                                  <p:childTnLst>
+                                    <p:set>
+                                      <p:cBhvr>
+                                        <p:cTn id="6" dur="1" fill="hold">
+                                          <p:stCondLst>
+                                            <p:cond delay="0"/>
+                                          </p:stCondLst>
+                                        </p:cTn>
+                                        <p:tgtEl>
+                                          <p:spTgt spid="3">
+                                            <p:txEl>
+                                              <p:pRg st="0" end="0"/>
+                                            </p:txEl>
+                                          </p:spTgt>
+                                        </p:tgtEl>
+                                        <p:attrNameLst>
+                                          <p:attrName>style.visibility</p:attrName>
+                                        </p:attrNameLst>
+                                      </p:cBhvr>
+                                      <p:to>
+                                        <p:strVal val="visible"/>
+                                      </p:to>
+                                    </p:set>
+                                  </p:childTnLst>
+                                </p:cTn>
+                              </p:par>
+                            </p:childTnLst>
+                          </p:cTn>
+                        </p:par>
+                      </p:childTnLst>
+                    </p:cTn>
+                  </p:par>
+                  <p:par>
+                    <p:cTn id="7" fill="hold">
+                      <p:stCondLst>
+                        <p:cond delay="indefinite"/>
+                      </p:stCondLst>
+                      <p:childTnLst>
+                        <p:par>
+                          <p:cTn id="8" fill="hold">
+                            <p:stCondLst>
+                              <p:cond delay="0"/>
+                            </p:stCondLst>
+                            <p:childTnLst>
+                              <p:par>
+                                <p:cTn id="9" presetID="1" presetClass="entr" presetSubtype="0" fill="hold" nodeType="clickEffect">
+                                  <p:stCondLst>
+                                    <p:cond delay="0"/>
+                                  </p:stCondLst>
+                                  <p:childTnLst>
+                                    <p:set>
+                                      <p:cBhvr>
+                                        <p:cTn id="10" dur="1" fill="hold">
+                                          <p:stCondLst>
+                                            <p:cond delay="0"/>
+                                          </p:stCondLst>
+                                        </p:cTn>
+                                        <p:tgtEl>
+                                          <p:spTgt spid="3">
+                                            <p:txEl>
+                                              <p:pRg st="1" end="1"/>
+                                            </p:txEl>
+                                          </p:spTgt>
+                                        </p:tgtEl>
+                                        <p:attrNameLst>
+                                          <p:attrName>style.visibility</p:attrName>
+                                        </p:attrNameLst>
+                                      </p:cBhvr>
+                                      <p:to>
+                                        <p:strVal val="visible"/>
+                                      </p:to>
+                                    </p:set>
+                                  </p:childTnLst>
+                                </p:cTn>
+                              </p:par>
+                            </p:childTnLst>
+                          </p:cTn>
+                        </p:par>
+                      </p:childTnLst>
+                    </p:cTn>
+                  </p:par>
+                </p:childTnLst>
+              </p:cTn>
+              <p:prevCondLst>
+                <p:cond evt="onPrev" delay="0">
+                  <p:tgtEl>
+                    <p:sldTgt/>
+                  </p:tgtEl>
+                </p:cond>
+              </p:prevCondLst>
+              <p:nextCondLst>
+                <p:cond evt="onNext" delay="0">
+                  <p:tgtEl>
+                    <p:sldTgt/>
+                  </p:tgtEl>
+                </p:cond>
+              </p:nextCondLst>
+            </p:seq>
+          </p:childTnLst>
+        </p:cTn>
+      </p:par>
+    </p:tnLst>
+  </p:timing>
 </p:sld>
 </file>
 
@@ -5558,6 +6823,15 @@
             </a:r>
           </a:p>
           <a:p>
+            <a:r>
+              <a:rPr lang="en-AU" dirty="0"/>
+              <a:t>Get the ratio of CD62L low to CD62L high overtime</a:t>
+            </a:r>
+          </a:p>
+          <a:p>
+            <a:endParaRPr lang="en-AU" dirty="0"/>
+          </a:p>
+          <a:p>
             <a:endParaRPr lang="en-AU" dirty="0"/>
           </a:p>
         </p:txBody>
@@ -5572,6 +6846,183 @@
   <p:clrMapOvr>
     <a:masterClrMapping/>
   </p:clrMapOvr>
+  <p:timing>
+    <p:tnLst>
+      <p:par>
+        <p:cTn id="1" dur="indefinite" restart="never" nodeType="tmRoot">
+          <p:childTnLst>
+            <p:seq concurrent="1" nextAc="seek">
+              <p:cTn id="2" dur="indefinite" nodeType="mainSeq">
+                <p:childTnLst>
+                  <p:par>
+                    <p:cTn id="3" fill="hold">
+                      <p:stCondLst>
+                        <p:cond delay="indefinite"/>
+                      </p:stCondLst>
+                      <p:childTnLst>
+                        <p:par>
+                          <p:cTn id="4" fill="hold">
+                            <p:stCondLst>
+                              <p:cond delay="0"/>
+                            </p:stCondLst>
+                            <p:childTnLst>
+                              <p:par>
+                                <p:cTn id="5" presetID="1" presetClass="entr" presetSubtype="0" fill="hold" nodeType="clickEffect">
+                                  <p:stCondLst>
+                                    <p:cond delay="0"/>
+                                  </p:stCondLst>
+                                  <p:childTnLst>
+                                    <p:set>
+                                      <p:cBhvr>
+                                        <p:cTn id="6" dur="1" fill="hold">
+                                          <p:stCondLst>
+                                            <p:cond delay="0"/>
+                                          </p:stCondLst>
+                                        </p:cTn>
+                                        <p:tgtEl>
+                                          <p:spTgt spid="3">
+                                            <p:txEl>
+                                              <p:pRg st="0" end="0"/>
+                                            </p:txEl>
+                                          </p:spTgt>
+                                        </p:tgtEl>
+                                        <p:attrNameLst>
+                                          <p:attrName>style.visibility</p:attrName>
+                                        </p:attrNameLst>
+                                      </p:cBhvr>
+                                      <p:to>
+                                        <p:strVal val="visible"/>
+                                      </p:to>
+                                    </p:set>
+                                  </p:childTnLst>
+                                </p:cTn>
+                              </p:par>
+                            </p:childTnLst>
+                          </p:cTn>
+                        </p:par>
+                      </p:childTnLst>
+                    </p:cTn>
+                  </p:par>
+                  <p:par>
+                    <p:cTn id="7" fill="hold">
+                      <p:stCondLst>
+                        <p:cond delay="indefinite"/>
+                      </p:stCondLst>
+                      <p:childTnLst>
+                        <p:par>
+                          <p:cTn id="8" fill="hold">
+                            <p:stCondLst>
+                              <p:cond delay="0"/>
+                            </p:stCondLst>
+                            <p:childTnLst>
+                              <p:par>
+                                <p:cTn id="9" presetID="1" presetClass="entr" presetSubtype="0" fill="hold" nodeType="clickEffect">
+                                  <p:stCondLst>
+                                    <p:cond delay="0"/>
+                                  </p:stCondLst>
+                                  <p:childTnLst>
+                                    <p:set>
+                                      <p:cBhvr>
+                                        <p:cTn id="10" dur="1" fill="hold">
+                                          <p:stCondLst>
+                                            <p:cond delay="0"/>
+                                          </p:stCondLst>
+                                        </p:cTn>
+                                        <p:tgtEl>
+                                          <p:spTgt spid="3">
+                                            <p:txEl>
+                                              <p:pRg st="1" end="1"/>
+                                            </p:txEl>
+                                          </p:spTgt>
+                                        </p:tgtEl>
+                                        <p:attrNameLst>
+                                          <p:attrName>style.visibility</p:attrName>
+                                        </p:attrNameLst>
+                                      </p:cBhvr>
+                                      <p:to>
+                                        <p:strVal val="visible"/>
+                                      </p:to>
+                                    </p:set>
+                                  </p:childTnLst>
+                                </p:cTn>
+                              </p:par>
+                            </p:childTnLst>
+                          </p:cTn>
+                        </p:par>
+                      </p:childTnLst>
+                    </p:cTn>
+                  </p:par>
+                  <p:par>
+                    <p:cTn id="11" fill="hold">
+                      <p:stCondLst>
+                        <p:cond delay="indefinite"/>
+                      </p:stCondLst>
+                      <p:childTnLst>
+                        <p:par>
+                          <p:cTn id="12" fill="hold">
+                            <p:stCondLst>
+                              <p:cond delay="0"/>
+                            </p:stCondLst>
+                            <p:childTnLst>
+                              <p:par>
+                                <p:cTn id="13" presetID="1" presetClass="entr" presetSubtype="0" fill="hold" nodeType="clickEffect">
+                                  <p:stCondLst>
+                                    <p:cond delay="0"/>
+                                  </p:stCondLst>
+                                  <p:childTnLst>
+                                    <p:set>
+                                      <p:cBhvr>
+                                        <p:cTn id="14" dur="1" fill="hold">
+                                          <p:stCondLst>
+                                            <p:cond delay="0"/>
+                                          </p:stCondLst>
+                                        </p:cTn>
+                                        <p:tgtEl>
+                                          <p:spTgt spid="3">
+                                            <p:txEl>
+                                              <p:pRg st="2" end="2"/>
+                                            </p:txEl>
+                                          </p:spTgt>
+                                        </p:tgtEl>
+                                        <p:attrNameLst>
+                                          <p:attrName>style.visibility</p:attrName>
+                                        </p:attrNameLst>
+                                      </p:cBhvr>
+                                      <p:to>
+                                        <p:strVal val="visible"/>
+                                      </p:to>
+                                    </p:set>
+                                  </p:childTnLst>
+                                </p:cTn>
+                              </p:par>
+                            </p:childTnLst>
+                          </p:cTn>
+                        </p:par>
+                      </p:childTnLst>
+                    </p:cTn>
+                  </p:par>
+                </p:childTnLst>
+              </p:cTn>
+              <p:prevCondLst>
+                <p:cond evt="onPrev" delay="0">
+                  <p:tgtEl>
+                    <p:sldTgt/>
+                  </p:tgtEl>
+                </p:cond>
+              </p:prevCondLst>
+              <p:nextCondLst>
+                <p:cond evt="onNext" delay="0">
+                  <p:tgtEl>
+                    <p:sldTgt/>
+                  </p:tgtEl>
+                </p:cond>
+              </p:nextCondLst>
+            </p:seq>
+          </p:childTnLst>
+        </p:cTn>
+      </p:par>
+    </p:tnLst>
+  </p:timing>
 </p:sld>
 </file>
 
@@ -5744,6 +7195,174 @@
   <p:clrMapOvr>
     <a:masterClrMapping/>
   </p:clrMapOvr>
+  <p:timing>
+    <p:tnLst>
+      <p:par>
+        <p:cTn id="1" dur="indefinite" restart="never" nodeType="tmRoot">
+          <p:childTnLst>
+            <p:seq concurrent="1" nextAc="seek">
+              <p:cTn id="2" dur="indefinite" nodeType="mainSeq">
+                <p:childTnLst>
+                  <p:par>
+                    <p:cTn id="3" fill="hold">
+                      <p:stCondLst>
+                        <p:cond delay="indefinite"/>
+                      </p:stCondLst>
+                      <p:childTnLst>
+                        <p:par>
+                          <p:cTn id="4" fill="hold">
+                            <p:stCondLst>
+                              <p:cond delay="0"/>
+                            </p:stCondLst>
+                            <p:childTnLst>
+                              <p:par>
+                                <p:cTn id="5" presetID="1" presetClass="entr" presetSubtype="0" fill="hold" nodeType="clickEffect">
+                                  <p:stCondLst>
+                                    <p:cond delay="0"/>
+                                  </p:stCondLst>
+                                  <p:childTnLst>
+                                    <p:set>
+                                      <p:cBhvr>
+                                        <p:cTn id="6" dur="1" fill="hold">
+                                          <p:stCondLst>
+                                            <p:cond delay="0"/>
+                                          </p:stCondLst>
+                                        </p:cTn>
+                                        <p:tgtEl>
+                                          <p:spTgt spid="7"/>
+                                        </p:tgtEl>
+                                        <p:attrNameLst>
+                                          <p:attrName>style.visibility</p:attrName>
+                                        </p:attrNameLst>
+                                      </p:cBhvr>
+                                      <p:to>
+                                        <p:strVal val="visible"/>
+                                      </p:to>
+                                    </p:set>
+                                  </p:childTnLst>
+                                </p:cTn>
+                              </p:par>
+                            </p:childTnLst>
+                          </p:cTn>
+                        </p:par>
+                      </p:childTnLst>
+                    </p:cTn>
+                  </p:par>
+                  <p:par>
+                    <p:cTn id="7" fill="hold">
+                      <p:stCondLst>
+                        <p:cond delay="indefinite"/>
+                      </p:stCondLst>
+                      <p:childTnLst>
+                        <p:par>
+                          <p:cTn id="8" fill="hold">
+                            <p:stCondLst>
+                              <p:cond delay="0"/>
+                            </p:stCondLst>
+                            <p:childTnLst>
+                              <p:par>
+                                <p:cTn id="9" presetID="1" presetClass="entr" presetSubtype="0" fill="hold" nodeType="clickEffect">
+                                  <p:stCondLst>
+                                    <p:cond delay="0"/>
+                                  </p:stCondLst>
+                                  <p:childTnLst>
+                                    <p:set>
+                                      <p:cBhvr>
+                                        <p:cTn id="10" dur="1" fill="hold">
+                                          <p:stCondLst>
+                                            <p:cond delay="0"/>
+                                          </p:stCondLst>
+                                        </p:cTn>
+                                        <p:tgtEl>
+                                          <p:spTgt spid="9"/>
+                                        </p:tgtEl>
+                                        <p:attrNameLst>
+                                          <p:attrName>style.visibility</p:attrName>
+                                        </p:attrNameLst>
+                                      </p:cBhvr>
+                                      <p:to>
+                                        <p:strVal val="visible"/>
+                                      </p:to>
+                                    </p:set>
+                                  </p:childTnLst>
+                                </p:cTn>
+                              </p:par>
+                            </p:childTnLst>
+                          </p:cTn>
+                        </p:par>
+                      </p:childTnLst>
+                    </p:cTn>
+                  </p:par>
+                  <p:par>
+                    <p:cTn id="11" fill="hold">
+                      <p:stCondLst>
+                        <p:cond delay="indefinite"/>
+                      </p:stCondLst>
+                      <p:childTnLst>
+                        <p:par>
+                          <p:cTn id="12" fill="hold">
+                            <p:stCondLst>
+                              <p:cond delay="0"/>
+                            </p:stCondLst>
+                            <p:childTnLst>
+                              <p:par>
+                                <p:cTn id="13" presetID="1" presetClass="entr" presetSubtype="0" fill="hold" grpId="0" nodeType="clickEffect">
+                                  <p:stCondLst>
+                                    <p:cond delay="0"/>
+                                  </p:stCondLst>
+                                  <p:childTnLst>
+                                    <p:set>
+                                      <p:cBhvr>
+                                        <p:cTn id="14" dur="1" fill="hold">
+                                          <p:stCondLst>
+                                            <p:cond delay="0"/>
+                                          </p:stCondLst>
+                                        </p:cTn>
+                                        <p:tgtEl>
+                                          <p:spTgt spid="11"/>
+                                        </p:tgtEl>
+                                        <p:attrNameLst>
+                                          <p:attrName>style.visibility</p:attrName>
+                                        </p:attrNameLst>
+                                      </p:cBhvr>
+                                      <p:to>
+                                        <p:strVal val="visible"/>
+                                      </p:to>
+                                    </p:set>
+                                  </p:childTnLst>
+                                </p:cTn>
+                              </p:par>
+                            </p:childTnLst>
+                          </p:cTn>
+                        </p:par>
+                      </p:childTnLst>
+                    </p:cTn>
+                  </p:par>
+                </p:childTnLst>
+              </p:cTn>
+              <p:prevCondLst>
+                <p:cond evt="onPrev" delay="0">
+                  <p:tgtEl>
+                    <p:sldTgt/>
+                  </p:tgtEl>
+                </p:cond>
+              </p:prevCondLst>
+              <p:nextCondLst>
+                <p:cond evt="onNext" delay="0">
+                  <p:tgtEl>
+                    <p:sldTgt/>
+                  </p:tgtEl>
+                </p:cond>
+              </p:nextCondLst>
+            </p:seq>
+          </p:childTnLst>
+        </p:cTn>
+      </p:par>
+    </p:tnLst>
+    <p:bldLst>
+      <p:bldP spid="11" grpId="0"/>
+    </p:bldLst>
+  </p:timing>
 </p:sld>
 </file>
 
@@ -5885,6 +7504,277 @@
   <p:clrMapOvr>
     <a:masterClrMapping/>
   </p:clrMapOvr>
+  <p:timing>
+    <p:tnLst>
+      <p:par>
+        <p:cTn id="1" dur="indefinite" restart="never" nodeType="tmRoot">
+          <p:childTnLst>
+            <p:seq concurrent="1" nextAc="seek">
+              <p:cTn id="2" dur="indefinite" nodeType="mainSeq">
+                <p:childTnLst>
+                  <p:par>
+                    <p:cTn id="3" fill="hold">
+                      <p:stCondLst>
+                        <p:cond delay="indefinite"/>
+                      </p:stCondLst>
+                      <p:childTnLst>
+                        <p:par>
+                          <p:cTn id="4" fill="hold">
+                            <p:stCondLst>
+                              <p:cond delay="0"/>
+                            </p:stCondLst>
+                            <p:childTnLst>
+                              <p:par>
+                                <p:cTn id="5" presetID="1" presetClass="entr" presetSubtype="0" fill="hold" nodeType="clickEffect">
+                                  <p:stCondLst>
+                                    <p:cond delay="0"/>
+                                  </p:stCondLst>
+                                  <p:childTnLst>
+                                    <p:set>
+                                      <p:cBhvr>
+                                        <p:cTn id="6" dur="1" fill="hold">
+                                          <p:stCondLst>
+                                            <p:cond delay="0"/>
+                                          </p:stCondLst>
+                                        </p:cTn>
+                                        <p:tgtEl>
+                                          <p:spTgt spid="9"/>
+                                        </p:tgtEl>
+                                        <p:attrNameLst>
+                                          <p:attrName>style.visibility</p:attrName>
+                                        </p:attrNameLst>
+                                      </p:cBhvr>
+                                      <p:to>
+                                        <p:strVal val="visible"/>
+                                      </p:to>
+                                    </p:set>
+                                  </p:childTnLst>
+                                </p:cTn>
+                              </p:par>
+                            </p:childTnLst>
+                          </p:cTn>
+                        </p:par>
+                      </p:childTnLst>
+                    </p:cTn>
+                  </p:par>
+                  <p:par>
+                    <p:cTn id="7" fill="hold">
+                      <p:stCondLst>
+                        <p:cond delay="indefinite"/>
+                      </p:stCondLst>
+                      <p:childTnLst>
+                        <p:par>
+                          <p:cTn id="8" fill="hold">
+                            <p:stCondLst>
+                              <p:cond delay="0"/>
+                            </p:stCondLst>
+                            <p:childTnLst>
+                              <p:par>
+                                <p:cTn id="9" presetID="1" presetClass="entr" presetSubtype="0" fill="hold" nodeType="clickEffect">
+                                  <p:stCondLst>
+                                    <p:cond delay="0"/>
+                                  </p:stCondLst>
+                                  <p:childTnLst>
+                                    <p:set>
+                                      <p:cBhvr>
+                                        <p:cTn id="10" dur="1" fill="hold">
+                                          <p:stCondLst>
+                                            <p:cond delay="0"/>
+                                          </p:stCondLst>
+                                        </p:cTn>
+                                        <p:tgtEl>
+                                          <p:spTgt spid="11">
+                                            <p:txEl>
+                                              <p:pRg st="0" end="0"/>
+                                            </p:txEl>
+                                          </p:spTgt>
+                                        </p:tgtEl>
+                                        <p:attrNameLst>
+                                          <p:attrName>style.visibility</p:attrName>
+                                        </p:attrNameLst>
+                                      </p:cBhvr>
+                                      <p:to>
+                                        <p:strVal val="visible"/>
+                                      </p:to>
+                                    </p:set>
+                                  </p:childTnLst>
+                                </p:cTn>
+                              </p:par>
+                            </p:childTnLst>
+                          </p:cTn>
+                        </p:par>
+                      </p:childTnLst>
+                    </p:cTn>
+                  </p:par>
+                  <p:par>
+                    <p:cTn id="11" fill="hold">
+                      <p:stCondLst>
+                        <p:cond delay="indefinite"/>
+                      </p:stCondLst>
+                      <p:childTnLst>
+                        <p:par>
+                          <p:cTn id="12" fill="hold">
+                            <p:stCondLst>
+                              <p:cond delay="0"/>
+                            </p:stCondLst>
+                            <p:childTnLst>
+                              <p:par>
+                                <p:cTn id="13" presetID="1" presetClass="entr" presetSubtype="0" fill="hold" nodeType="clickEffect">
+                                  <p:stCondLst>
+                                    <p:cond delay="0"/>
+                                  </p:stCondLst>
+                                  <p:childTnLst>
+                                    <p:set>
+                                      <p:cBhvr>
+                                        <p:cTn id="14" dur="1" fill="hold">
+                                          <p:stCondLst>
+                                            <p:cond delay="0"/>
+                                          </p:stCondLst>
+                                        </p:cTn>
+                                        <p:tgtEl>
+                                          <p:spTgt spid="11">
+                                            <p:txEl>
+                                              <p:pRg st="1" end="1"/>
+                                            </p:txEl>
+                                          </p:spTgt>
+                                        </p:tgtEl>
+                                        <p:attrNameLst>
+                                          <p:attrName>style.visibility</p:attrName>
+                                        </p:attrNameLst>
+                                      </p:cBhvr>
+                                      <p:to>
+                                        <p:strVal val="visible"/>
+                                      </p:to>
+                                    </p:set>
+                                  </p:childTnLst>
+                                </p:cTn>
+                              </p:par>
+                            </p:childTnLst>
+                          </p:cTn>
+                        </p:par>
+                      </p:childTnLst>
+                    </p:cTn>
+                  </p:par>
+                  <p:par>
+                    <p:cTn id="15" fill="hold">
+                      <p:stCondLst>
+                        <p:cond delay="indefinite"/>
+                      </p:stCondLst>
+                      <p:childTnLst>
+                        <p:par>
+                          <p:cTn id="16" fill="hold">
+                            <p:stCondLst>
+                              <p:cond delay="0"/>
+                            </p:stCondLst>
+                            <p:childTnLst>
+                              <p:par>
+                                <p:cTn id="17" presetID="1" presetClass="entr" presetSubtype="0" fill="hold" nodeType="clickEffect">
+                                  <p:stCondLst>
+                                    <p:cond delay="0"/>
+                                  </p:stCondLst>
+                                  <p:childTnLst>
+                                    <p:set>
+                                      <p:cBhvr>
+                                        <p:cTn id="18" dur="1" fill="hold">
+                                          <p:stCondLst>
+                                            <p:cond delay="0"/>
+                                          </p:stCondLst>
+                                        </p:cTn>
+                                        <p:tgtEl>
+                                          <p:spTgt spid="11">
+                                            <p:txEl>
+                                              <p:pRg st="2" end="2"/>
+                                            </p:txEl>
+                                          </p:spTgt>
+                                        </p:tgtEl>
+                                        <p:attrNameLst>
+                                          <p:attrName>style.visibility</p:attrName>
+                                        </p:attrNameLst>
+                                      </p:cBhvr>
+                                      <p:to>
+                                        <p:strVal val="visible"/>
+                                      </p:to>
+                                    </p:set>
+                                  </p:childTnLst>
+                                </p:cTn>
+                              </p:par>
+                            </p:childTnLst>
+                          </p:cTn>
+                        </p:par>
+                      </p:childTnLst>
+                    </p:cTn>
+                  </p:par>
+                  <p:par>
+                    <p:cTn id="19" fill="hold">
+                      <p:stCondLst>
+                        <p:cond delay="indefinite"/>
+                      </p:stCondLst>
+                      <p:childTnLst>
+                        <p:par>
+                          <p:cTn id="20" fill="hold">
+                            <p:stCondLst>
+                              <p:cond delay="0"/>
+                            </p:stCondLst>
+                            <p:childTnLst>
+                              <p:par>
+                                <p:cTn id="21" presetID="1" presetClass="entr" presetSubtype="0" fill="hold" nodeType="clickEffect">
+                                  <p:stCondLst>
+                                    <p:cond delay="0"/>
+                                  </p:stCondLst>
+                                  <p:childTnLst>
+                                    <p:set>
+                                      <p:cBhvr>
+                                        <p:cTn id="22" dur="1" fill="hold">
+                                          <p:stCondLst>
+                                            <p:cond delay="0"/>
+                                          </p:stCondLst>
+                                        </p:cTn>
+                                        <p:tgtEl>
+                                          <p:spTgt spid="11">
+                                            <p:txEl>
+                                              <p:pRg st="3" end="3"/>
+                                            </p:txEl>
+                                          </p:spTgt>
+                                        </p:tgtEl>
+                                        <p:attrNameLst>
+                                          <p:attrName>style.visibility</p:attrName>
+                                        </p:attrNameLst>
+                                      </p:cBhvr>
+                                      <p:to>
+                                        <p:strVal val="visible"/>
+                                      </p:to>
+                                    </p:set>
+                                  </p:childTnLst>
+                                </p:cTn>
+                              </p:par>
+                            </p:childTnLst>
+                          </p:cTn>
+                        </p:par>
+                      </p:childTnLst>
+                    </p:cTn>
+                  </p:par>
+                </p:childTnLst>
+              </p:cTn>
+              <p:prevCondLst>
+                <p:cond evt="onPrev" delay="0">
+                  <p:tgtEl>
+                    <p:sldTgt/>
+                  </p:tgtEl>
+                </p:cond>
+              </p:prevCondLst>
+              <p:nextCondLst>
+                <p:cond evt="onNext" delay="0">
+                  <p:tgtEl>
+                    <p:sldTgt/>
+                  </p:tgtEl>
+                </p:cond>
+              </p:nextCondLst>
+            </p:seq>
+          </p:childTnLst>
+        </p:cTn>
+      </p:par>
+    </p:tnLst>
+  </p:timing>
 </p:sld>
 </file>
 
@@ -6071,7 +7961,7 @@
         </p:blipFill>
         <p:spPr>
           <a:xfrm>
-            <a:off x="9169746" y="535478"/>
+            <a:off x="8969721" y="319168"/>
             <a:ext cx="1339319" cy="580250"/>
           </a:xfrm>
           <a:prstGeom prst="rect">
@@ -6119,6 +8009,252 @@
   <p:clrMapOvr>
     <a:masterClrMapping/>
   </p:clrMapOvr>
+  <p:timing>
+    <p:tnLst>
+      <p:par>
+        <p:cTn id="1" dur="indefinite" restart="never" nodeType="tmRoot">
+          <p:childTnLst>
+            <p:seq concurrent="1" nextAc="seek">
+              <p:cTn id="2" dur="indefinite" nodeType="mainSeq">
+                <p:childTnLst>
+                  <p:par>
+                    <p:cTn id="3" fill="hold">
+                      <p:stCondLst>
+                        <p:cond delay="indefinite"/>
+                      </p:stCondLst>
+                      <p:childTnLst>
+                        <p:par>
+                          <p:cTn id="4" fill="hold">
+                            <p:stCondLst>
+                              <p:cond delay="0"/>
+                            </p:stCondLst>
+                            <p:childTnLst>
+                              <p:par>
+                                <p:cTn id="5" presetID="1" presetClass="entr" presetSubtype="0" fill="hold" nodeType="clickEffect">
+                                  <p:stCondLst>
+                                    <p:cond delay="0"/>
+                                  </p:stCondLst>
+                                  <p:childTnLst>
+                                    <p:set>
+                                      <p:cBhvr>
+                                        <p:cTn id="6" dur="1" fill="hold">
+                                          <p:stCondLst>
+                                            <p:cond delay="0"/>
+                                          </p:stCondLst>
+                                        </p:cTn>
+                                        <p:tgtEl>
+                                          <p:spTgt spid="3"/>
+                                        </p:tgtEl>
+                                        <p:attrNameLst>
+                                          <p:attrName>style.visibility</p:attrName>
+                                        </p:attrNameLst>
+                                      </p:cBhvr>
+                                      <p:to>
+                                        <p:strVal val="visible"/>
+                                      </p:to>
+                                    </p:set>
+                                  </p:childTnLst>
+                                </p:cTn>
+                              </p:par>
+                              <p:par>
+                                <p:cTn id="7" presetID="1" presetClass="entr" presetSubtype="0" fill="hold" nodeType="withEffect">
+                                  <p:stCondLst>
+                                    <p:cond delay="0"/>
+                                  </p:stCondLst>
+                                  <p:childTnLst>
+                                    <p:set>
+                                      <p:cBhvr>
+                                        <p:cTn id="8" dur="1" fill="hold">
+                                          <p:stCondLst>
+                                            <p:cond delay="0"/>
+                                          </p:stCondLst>
+                                        </p:cTn>
+                                        <p:tgtEl>
+                                          <p:spTgt spid="6"/>
+                                        </p:tgtEl>
+                                        <p:attrNameLst>
+                                          <p:attrName>style.visibility</p:attrName>
+                                        </p:attrNameLst>
+                                      </p:cBhvr>
+                                      <p:to>
+                                        <p:strVal val="visible"/>
+                                      </p:to>
+                                    </p:set>
+                                  </p:childTnLst>
+                                </p:cTn>
+                              </p:par>
+                            </p:childTnLst>
+                          </p:cTn>
+                        </p:par>
+                      </p:childTnLst>
+                    </p:cTn>
+                  </p:par>
+                  <p:par>
+                    <p:cTn id="9" fill="hold">
+                      <p:stCondLst>
+                        <p:cond delay="indefinite"/>
+                      </p:stCondLst>
+                      <p:childTnLst>
+                        <p:par>
+                          <p:cTn id="10" fill="hold">
+                            <p:stCondLst>
+                              <p:cond delay="0"/>
+                            </p:stCondLst>
+                            <p:childTnLst>
+                              <p:par>
+                                <p:cTn id="11" presetID="1" presetClass="entr" presetSubtype="0" fill="hold" nodeType="clickEffect">
+                                  <p:stCondLst>
+                                    <p:cond delay="0"/>
+                                  </p:stCondLst>
+                                  <p:childTnLst>
+                                    <p:set>
+                                      <p:cBhvr>
+                                        <p:cTn id="12" dur="1" fill="hold">
+                                          <p:stCondLst>
+                                            <p:cond delay="0"/>
+                                          </p:stCondLst>
+                                        </p:cTn>
+                                        <p:tgtEl>
+                                          <p:spTgt spid="14"/>
+                                        </p:tgtEl>
+                                        <p:attrNameLst>
+                                          <p:attrName>style.visibility</p:attrName>
+                                        </p:attrNameLst>
+                                      </p:cBhvr>
+                                      <p:to>
+                                        <p:strVal val="visible"/>
+                                      </p:to>
+                                    </p:set>
+                                  </p:childTnLst>
+                                </p:cTn>
+                              </p:par>
+                              <p:par>
+                                <p:cTn id="13" presetID="1" presetClass="entr" presetSubtype="0" fill="hold" nodeType="withEffect">
+                                  <p:stCondLst>
+                                    <p:cond delay="0"/>
+                                  </p:stCondLst>
+                                  <p:childTnLst>
+                                    <p:set>
+                                      <p:cBhvr>
+                                        <p:cTn id="14" dur="1" fill="hold">
+                                          <p:stCondLst>
+                                            <p:cond delay="0"/>
+                                          </p:stCondLst>
+                                        </p:cTn>
+                                        <p:tgtEl>
+                                          <p:spTgt spid="9"/>
+                                        </p:tgtEl>
+                                        <p:attrNameLst>
+                                          <p:attrName>style.visibility</p:attrName>
+                                        </p:attrNameLst>
+                                      </p:cBhvr>
+                                      <p:to>
+                                        <p:strVal val="visible"/>
+                                      </p:to>
+                                    </p:set>
+                                  </p:childTnLst>
+                                </p:cTn>
+                              </p:par>
+                            </p:childTnLst>
+                          </p:cTn>
+                        </p:par>
+                      </p:childTnLst>
+                    </p:cTn>
+                  </p:par>
+                  <p:par>
+                    <p:cTn id="15" fill="hold">
+                      <p:stCondLst>
+                        <p:cond delay="indefinite"/>
+                      </p:stCondLst>
+                      <p:childTnLst>
+                        <p:par>
+                          <p:cTn id="16" fill="hold">
+                            <p:stCondLst>
+                              <p:cond delay="0"/>
+                            </p:stCondLst>
+                            <p:childTnLst>
+                              <p:par>
+                                <p:cTn id="17" presetID="1" presetClass="entr" presetSubtype="0" fill="hold" nodeType="clickEffect">
+                                  <p:stCondLst>
+                                    <p:cond delay="0"/>
+                                  </p:stCondLst>
+                                  <p:childTnLst>
+                                    <p:set>
+                                      <p:cBhvr>
+                                        <p:cTn id="18" dur="1" fill="hold">
+                                          <p:stCondLst>
+                                            <p:cond delay="0"/>
+                                          </p:stCondLst>
+                                        </p:cTn>
+                                        <p:tgtEl>
+                                          <p:spTgt spid="16"/>
+                                        </p:tgtEl>
+                                        <p:attrNameLst>
+                                          <p:attrName>style.visibility</p:attrName>
+                                        </p:attrNameLst>
+                                      </p:cBhvr>
+                                      <p:to>
+                                        <p:strVal val="visible"/>
+                                      </p:to>
+                                    </p:set>
+                                  </p:childTnLst>
+                                </p:cTn>
+                              </p:par>
+                              <p:par>
+                                <p:cTn id="19" presetID="1" presetClass="entr" presetSubtype="0" fill="hold" nodeType="withEffect">
+                                  <p:stCondLst>
+                                    <p:cond delay="0"/>
+                                  </p:stCondLst>
+                                  <p:childTnLst>
+                                    <p:set>
+                                      <p:cBhvr>
+                                        <p:cTn id="20" dur="1" fill="hold">
+                                          <p:stCondLst>
+                                            <p:cond delay="0"/>
+                                          </p:stCondLst>
+                                        </p:cTn>
+                                        <p:tgtEl>
+                                          <p:spTgt spid="12"/>
+                                        </p:tgtEl>
+                                        <p:attrNameLst>
+                                          <p:attrName>style.visibility</p:attrName>
+                                        </p:attrNameLst>
+                                      </p:cBhvr>
+                                      <p:to>
+                                        <p:strVal val="visible"/>
+                                      </p:to>
+                                    </p:set>
+                                  </p:childTnLst>
+                                </p:cTn>
+                              </p:par>
+                            </p:childTnLst>
+                          </p:cTn>
+                        </p:par>
+                      </p:childTnLst>
+                    </p:cTn>
+                  </p:par>
+                </p:childTnLst>
+              </p:cTn>
+              <p:prevCondLst>
+                <p:cond evt="onPrev" delay="0">
+                  <p:tgtEl>
+                    <p:sldTgt/>
+                  </p:tgtEl>
+                </p:cond>
+              </p:prevCondLst>
+              <p:nextCondLst>
+                <p:cond evt="onNext" delay="0">
+                  <p:tgtEl>
+                    <p:sldTgt/>
+                  </p:tgtEl>
+                </p:cond>
+              </p:nextCondLst>
+            </p:seq>
+          </p:childTnLst>
+        </p:cTn>
+      </p:par>
+    </p:tnLst>
+  </p:timing>
 </p:sld>
 </file>
 
@@ -6270,6 +8406,126 @@
   <p:clrMapOvr>
     <a:masterClrMapping/>
   </p:clrMapOvr>
+  <p:timing>
+    <p:tnLst>
+      <p:par>
+        <p:cTn id="1" dur="indefinite" restart="never" nodeType="tmRoot">
+          <p:childTnLst>
+            <p:seq concurrent="1" nextAc="seek">
+              <p:cTn id="2" dur="indefinite" nodeType="mainSeq">
+                <p:childTnLst>
+                  <p:par>
+                    <p:cTn id="3" fill="hold">
+                      <p:stCondLst>
+                        <p:cond delay="indefinite"/>
+                      </p:stCondLst>
+                      <p:childTnLst>
+                        <p:par>
+                          <p:cTn id="4" fill="hold">
+                            <p:stCondLst>
+                              <p:cond delay="0"/>
+                            </p:stCondLst>
+                            <p:childTnLst>
+                              <p:par>
+                                <p:cTn id="5" presetID="1" presetClass="entr" presetSubtype="0" fill="hold" nodeType="clickEffect">
+                                  <p:stCondLst>
+                                    <p:cond delay="0"/>
+                                  </p:stCondLst>
+                                  <p:childTnLst>
+                                    <p:set>
+                                      <p:cBhvr>
+                                        <p:cTn id="6" dur="1" fill="hold">
+                                          <p:stCondLst>
+                                            <p:cond delay="0"/>
+                                          </p:stCondLst>
+                                        </p:cTn>
+                                        <p:tgtEl>
+                                          <p:spTgt spid="5"/>
+                                        </p:tgtEl>
+                                        <p:attrNameLst>
+                                          <p:attrName>style.visibility</p:attrName>
+                                        </p:attrNameLst>
+                                      </p:cBhvr>
+                                      <p:to>
+                                        <p:strVal val="visible"/>
+                                      </p:to>
+                                    </p:set>
+                                  </p:childTnLst>
+                                </p:cTn>
+                              </p:par>
+                            </p:childTnLst>
+                          </p:cTn>
+                        </p:par>
+                      </p:childTnLst>
+                    </p:cTn>
+                  </p:par>
+                  <p:par>
+                    <p:cTn id="7" fill="hold">
+                      <p:stCondLst>
+                        <p:cond delay="indefinite"/>
+                      </p:stCondLst>
+                      <p:childTnLst>
+                        <p:par>
+                          <p:cTn id="8" fill="hold">
+                            <p:stCondLst>
+                              <p:cond delay="0"/>
+                            </p:stCondLst>
+                            <p:childTnLst>
+                              <p:par>
+                                <p:cTn id="9" presetID="1" presetClass="entr" presetSubtype="0" fill="hold" nodeType="clickEffect">
+                                  <p:stCondLst>
+                                    <p:cond delay="0"/>
+                                  </p:stCondLst>
+                                  <p:childTnLst>
+                                    <p:set>
+                                      <p:cBhvr>
+                                        <p:cTn id="10" dur="1" fill="hold">
+                                          <p:stCondLst>
+                                            <p:cond delay="0"/>
+                                          </p:stCondLst>
+                                        </p:cTn>
+                                        <p:tgtEl>
+                                          <p:spTgt spid="7"/>
+                                        </p:tgtEl>
+                                        <p:attrNameLst>
+                                          <p:attrName>style.visibility</p:attrName>
+                                        </p:attrNameLst>
+                                      </p:cBhvr>
+                                      <p:to>
+                                        <p:strVal val="visible"/>
+                                      </p:to>
+                                    </p:set>
+                                  </p:childTnLst>
+                                </p:cTn>
+                              </p:par>
+                            </p:childTnLst>
+                          </p:cTn>
+                        </p:par>
+                      </p:childTnLst>
+                    </p:cTn>
+                  </p:par>
+                </p:childTnLst>
+              </p:cTn>
+              <p:prevCondLst>
+                <p:cond evt="onPrev" delay="0">
+                  <p:tgtEl>
+                    <p:sldTgt/>
+                  </p:tgtEl>
+                </p:cond>
+              </p:prevCondLst>
+              <p:nextCondLst>
+                <p:cond evt="onNext" delay="0">
+                  <p:tgtEl>
+                    <p:sldTgt/>
+                  </p:tgtEl>
+                </p:cond>
+              </p:nextCondLst>
+            </p:seq>
+          </p:childTnLst>
+        </p:cTn>
+      </p:par>
+    </p:tnLst>
+  </p:timing>
 </p:sld>
 </file>
 
@@ -6504,6 +8760,252 @@
   <p:clrMapOvr>
     <a:masterClrMapping/>
   </p:clrMapOvr>
+  <p:timing>
+    <p:tnLst>
+      <p:par>
+        <p:cTn id="1" dur="indefinite" restart="never" nodeType="tmRoot">
+          <p:childTnLst>
+            <p:seq concurrent="1" nextAc="seek">
+              <p:cTn id="2" dur="indefinite" nodeType="mainSeq">
+                <p:childTnLst>
+                  <p:par>
+                    <p:cTn id="3" fill="hold">
+                      <p:stCondLst>
+                        <p:cond delay="indefinite"/>
+                      </p:stCondLst>
+                      <p:childTnLst>
+                        <p:par>
+                          <p:cTn id="4" fill="hold">
+                            <p:stCondLst>
+                              <p:cond delay="0"/>
+                            </p:stCondLst>
+                            <p:childTnLst>
+                              <p:par>
+                                <p:cTn id="5" presetID="1" presetClass="entr" presetSubtype="0" fill="hold" nodeType="clickEffect">
+                                  <p:stCondLst>
+                                    <p:cond delay="0"/>
+                                  </p:stCondLst>
+                                  <p:childTnLst>
+                                    <p:set>
+                                      <p:cBhvr>
+                                        <p:cTn id="6" dur="1" fill="hold">
+                                          <p:stCondLst>
+                                            <p:cond delay="0"/>
+                                          </p:stCondLst>
+                                        </p:cTn>
+                                        <p:tgtEl>
+                                          <p:spTgt spid="6"/>
+                                        </p:tgtEl>
+                                        <p:attrNameLst>
+                                          <p:attrName>style.visibility</p:attrName>
+                                        </p:attrNameLst>
+                                      </p:cBhvr>
+                                      <p:to>
+                                        <p:strVal val="visible"/>
+                                      </p:to>
+                                    </p:set>
+                                  </p:childTnLst>
+                                </p:cTn>
+                              </p:par>
+                              <p:par>
+                                <p:cTn id="7" presetID="1" presetClass="entr" presetSubtype="0" fill="hold" nodeType="withEffect">
+                                  <p:stCondLst>
+                                    <p:cond delay="0"/>
+                                  </p:stCondLst>
+                                  <p:childTnLst>
+                                    <p:set>
+                                      <p:cBhvr>
+                                        <p:cTn id="8" dur="1" fill="hold">
+                                          <p:stCondLst>
+                                            <p:cond delay="0"/>
+                                          </p:stCondLst>
+                                        </p:cTn>
+                                        <p:tgtEl>
+                                          <p:spTgt spid="4"/>
+                                        </p:tgtEl>
+                                        <p:attrNameLst>
+                                          <p:attrName>style.visibility</p:attrName>
+                                        </p:attrNameLst>
+                                      </p:cBhvr>
+                                      <p:to>
+                                        <p:strVal val="visible"/>
+                                      </p:to>
+                                    </p:set>
+                                  </p:childTnLst>
+                                </p:cTn>
+                              </p:par>
+                            </p:childTnLst>
+                          </p:cTn>
+                        </p:par>
+                      </p:childTnLst>
+                    </p:cTn>
+                  </p:par>
+                  <p:par>
+                    <p:cTn id="9" fill="hold">
+                      <p:stCondLst>
+                        <p:cond delay="indefinite"/>
+                      </p:stCondLst>
+                      <p:childTnLst>
+                        <p:par>
+                          <p:cTn id="10" fill="hold">
+                            <p:stCondLst>
+                              <p:cond delay="0"/>
+                            </p:stCondLst>
+                            <p:childTnLst>
+                              <p:par>
+                                <p:cTn id="11" presetID="1" presetClass="entr" presetSubtype="0" fill="hold" nodeType="clickEffect">
+                                  <p:stCondLst>
+                                    <p:cond delay="0"/>
+                                  </p:stCondLst>
+                                  <p:childTnLst>
+                                    <p:set>
+                                      <p:cBhvr>
+                                        <p:cTn id="12" dur="1" fill="hold">
+                                          <p:stCondLst>
+                                            <p:cond delay="0"/>
+                                          </p:stCondLst>
+                                        </p:cTn>
+                                        <p:tgtEl>
+                                          <p:spTgt spid="7"/>
+                                        </p:tgtEl>
+                                        <p:attrNameLst>
+                                          <p:attrName>style.visibility</p:attrName>
+                                        </p:attrNameLst>
+                                      </p:cBhvr>
+                                      <p:to>
+                                        <p:strVal val="visible"/>
+                                      </p:to>
+                                    </p:set>
+                                  </p:childTnLst>
+                                </p:cTn>
+                              </p:par>
+                              <p:par>
+                                <p:cTn id="13" presetID="1" presetClass="entr" presetSubtype="0" fill="hold" nodeType="withEffect">
+                                  <p:stCondLst>
+                                    <p:cond delay="0"/>
+                                  </p:stCondLst>
+                                  <p:childTnLst>
+                                    <p:set>
+                                      <p:cBhvr>
+                                        <p:cTn id="14" dur="1" fill="hold">
+                                          <p:stCondLst>
+                                            <p:cond delay="0"/>
+                                          </p:stCondLst>
+                                        </p:cTn>
+                                        <p:tgtEl>
+                                          <p:spTgt spid="14"/>
+                                        </p:tgtEl>
+                                        <p:attrNameLst>
+                                          <p:attrName>style.visibility</p:attrName>
+                                        </p:attrNameLst>
+                                      </p:cBhvr>
+                                      <p:to>
+                                        <p:strVal val="visible"/>
+                                      </p:to>
+                                    </p:set>
+                                  </p:childTnLst>
+                                </p:cTn>
+                              </p:par>
+                            </p:childTnLst>
+                          </p:cTn>
+                        </p:par>
+                      </p:childTnLst>
+                    </p:cTn>
+                  </p:par>
+                  <p:par>
+                    <p:cTn id="15" fill="hold">
+                      <p:stCondLst>
+                        <p:cond delay="indefinite"/>
+                      </p:stCondLst>
+                      <p:childTnLst>
+                        <p:par>
+                          <p:cTn id="16" fill="hold">
+                            <p:stCondLst>
+                              <p:cond delay="0"/>
+                            </p:stCondLst>
+                            <p:childTnLst>
+                              <p:par>
+                                <p:cTn id="17" presetID="1" presetClass="entr" presetSubtype="0" fill="hold" nodeType="clickEffect">
+                                  <p:stCondLst>
+                                    <p:cond delay="0"/>
+                                  </p:stCondLst>
+                                  <p:childTnLst>
+                                    <p:set>
+                                      <p:cBhvr>
+                                        <p:cTn id="18" dur="1" fill="hold">
+                                          <p:stCondLst>
+                                            <p:cond delay="0"/>
+                                          </p:stCondLst>
+                                        </p:cTn>
+                                        <p:tgtEl>
+                                          <p:spTgt spid="10"/>
+                                        </p:tgtEl>
+                                        <p:attrNameLst>
+                                          <p:attrName>style.visibility</p:attrName>
+                                        </p:attrNameLst>
+                                      </p:cBhvr>
+                                      <p:to>
+                                        <p:strVal val="visible"/>
+                                      </p:to>
+                                    </p:set>
+                                  </p:childTnLst>
+                                </p:cTn>
+                              </p:par>
+                              <p:par>
+                                <p:cTn id="19" presetID="1" presetClass="entr" presetSubtype="0" fill="hold" nodeType="withEffect">
+                                  <p:stCondLst>
+                                    <p:cond delay="0"/>
+                                  </p:stCondLst>
+                                  <p:childTnLst>
+                                    <p:set>
+                                      <p:cBhvr>
+                                        <p:cTn id="20" dur="1" fill="hold">
+                                          <p:stCondLst>
+                                            <p:cond delay="0"/>
+                                          </p:stCondLst>
+                                        </p:cTn>
+                                        <p:tgtEl>
+                                          <p:spTgt spid="16"/>
+                                        </p:tgtEl>
+                                        <p:attrNameLst>
+                                          <p:attrName>style.visibility</p:attrName>
+                                        </p:attrNameLst>
+                                      </p:cBhvr>
+                                      <p:to>
+                                        <p:strVal val="visible"/>
+                                      </p:to>
+                                    </p:set>
+                                  </p:childTnLst>
+                                </p:cTn>
+                              </p:par>
+                            </p:childTnLst>
+                          </p:cTn>
+                        </p:par>
+                      </p:childTnLst>
+                    </p:cTn>
+                  </p:par>
+                </p:childTnLst>
+              </p:cTn>
+              <p:prevCondLst>
+                <p:cond evt="onPrev" delay="0">
+                  <p:tgtEl>
+                    <p:sldTgt/>
+                  </p:tgtEl>
+                </p:cond>
+              </p:prevCondLst>
+              <p:nextCondLst>
+                <p:cond evt="onNext" delay="0">
+                  <p:tgtEl>
+                    <p:sldTgt/>
+                  </p:tgtEl>
+                </p:cond>
+              </p:nextCondLst>
+            </p:seq>
+          </p:childTnLst>
+        </p:cTn>
+      </p:par>
+    </p:tnLst>
+  </p:timing>
 </p:sld>
 </file>
 
@@ -6655,6 +9157,126 @@
   <p:clrMapOvr>
     <a:masterClrMapping/>
   </p:clrMapOvr>
+  <p:timing>
+    <p:tnLst>
+      <p:par>
+        <p:cTn id="1" dur="indefinite" restart="never" nodeType="tmRoot">
+          <p:childTnLst>
+            <p:seq concurrent="1" nextAc="seek">
+              <p:cTn id="2" dur="indefinite" nodeType="mainSeq">
+                <p:childTnLst>
+                  <p:par>
+                    <p:cTn id="3" fill="hold">
+                      <p:stCondLst>
+                        <p:cond delay="indefinite"/>
+                      </p:stCondLst>
+                      <p:childTnLst>
+                        <p:par>
+                          <p:cTn id="4" fill="hold">
+                            <p:stCondLst>
+                              <p:cond delay="0"/>
+                            </p:stCondLst>
+                            <p:childTnLst>
+                              <p:par>
+                                <p:cTn id="5" presetID="1" presetClass="entr" presetSubtype="0" fill="hold" nodeType="clickEffect">
+                                  <p:stCondLst>
+                                    <p:cond delay="0"/>
+                                  </p:stCondLst>
+                                  <p:childTnLst>
+                                    <p:set>
+                                      <p:cBhvr>
+                                        <p:cTn id="6" dur="1" fill="hold">
+                                          <p:stCondLst>
+                                            <p:cond delay="0"/>
+                                          </p:stCondLst>
+                                        </p:cTn>
+                                        <p:tgtEl>
+                                          <p:spTgt spid="4"/>
+                                        </p:tgtEl>
+                                        <p:attrNameLst>
+                                          <p:attrName>style.visibility</p:attrName>
+                                        </p:attrNameLst>
+                                      </p:cBhvr>
+                                      <p:to>
+                                        <p:strVal val="visible"/>
+                                      </p:to>
+                                    </p:set>
+                                  </p:childTnLst>
+                                </p:cTn>
+                              </p:par>
+                            </p:childTnLst>
+                          </p:cTn>
+                        </p:par>
+                      </p:childTnLst>
+                    </p:cTn>
+                  </p:par>
+                  <p:par>
+                    <p:cTn id="7" fill="hold">
+                      <p:stCondLst>
+                        <p:cond delay="indefinite"/>
+                      </p:stCondLst>
+                      <p:childTnLst>
+                        <p:par>
+                          <p:cTn id="8" fill="hold">
+                            <p:stCondLst>
+                              <p:cond delay="0"/>
+                            </p:stCondLst>
+                            <p:childTnLst>
+                              <p:par>
+                                <p:cTn id="9" presetID="1" presetClass="entr" presetSubtype="0" fill="hold" nodeType="clickEffect">
+                                  <p:stCondLst>
+                                    <p:cond delay="0"/>
+                                  </p:stCondLst>
+                                  <p:childTnLst>
+                                    <p:set>
+                                      <p:cBhvr>
+                                        <p:cTn id="10" dur="1" fill="hold">
+                                          <p:stCondLst>
+                                            <p:cond delay="0"/>
+                                          </p:stCondLst>
+                                        </p:cTn>
+                                        <p:tgtEl>
+                                          <p:spTgt spid="8"/>
+                                        </p:tgtEl>
+                                        <p:attrNameLst>
+                                          <p:attrName>style.visibility</p:attrName>
+                                        </p:attrNameLst>
+                                      </p:cBhvr>
+                                      <p:to>
+                                        <p:strVal val="visible"/>
+                                      </p:to>
+                                    </p:set>
+                                  </p:childTnLst>
+                                </p:cTn>
+                              </p:par>
+                            </p:childTnLst>
+                          </p:cTn>
+                        </p:par>
+                      </p:childTnLst>
+                    </p:cTn>
+                  </p:par>
+                </p:childTnLst>
+              </p:cTn>
+              <p:prevCondLst>
+                <p:cond evt="onPrev" delay="0">
+                  <p:tgtEl>
+                    <p:sldTgt/>
+                  </p:tgtEl>
+                </p:cond>
+              </p:prevCondLst>
+              <p:nextCondLst>
+                <p:cond evt="onNext" delay="0">
+                  <p:tgtEl>
+                    <p:sldTgt/>
+                  </p:tgtEl>
+                </p:cond>
+              </p:nextCondLst>
+            </p:seq>
+          </p:childTnLst>
+        </p:cTn>
+      </p:par>
+    </p:tnLst>
+  </p:timing>
 </p:sld>
 </file>
 
@@ -6889,6 +9511,252 @@
   <p:clrMapOvr>
     <a:masterClrMapping/>
   </p:clrMapOvr>
+  <p:timing>
+    <p:tnLst>
+      <p:par>
+        <p:cTn id="1" dur="indefinite" restart="never" nodeType="tmRoot">
+          <p:childTnLst>
+            <p:seq concurrent="1" nextAc="seek">
+              <p:cTn id="2" dur="indefinite" nodeType="mainSeq">
+                <p:childTnLst>
+                  <p:par>
+                    <p:cTn id="3" fill="hold">
+                      <p:stCondLst>
+                        <p:cond delay="indefinite"/>
+                      </p:stCondLst>
+                      <p:childTnLst>
+                        <p:par>
+                          <p:cTn id="4" fill="hold">
+                            <p:stCondLst>
+                              <p:cond delay="0"/>
+                            </p:stCondLst>
+                            <p:childTnLst>
+                              <p:par>
+                                <p:cTn id="5" presetID="1" presetClass="entr" presetSubtype="0" fill="hold" nodeType="clickEffect">
+                                  <p:stCondLst>
+                                    <p:cond delay="0"/>
+                                  </p:stCondLst>
+                                  <p:childTnLst>
+                                    <p:set>
+                                      <p:cBhvr>
+                                        <p:cTn id="6" dur="1" fill="hold">
+                                          <p:stCondLst>
+                                            <p:cond delay="0"/>
+                                          </p:stCondLst>
+                                        </p:cTn>
+                                        <p:tgtEl>
+                                          <p:spTgt spid="3"/>
+                                        </p:tgtEl>
+                                        <p:attrNameLst>
+                                          <p:attrName>style.visibility</p:attrName>
+                                        </p:attrNameLst>
+                                      </p:cBhvr>
+                                      <p:to>
+                                        <p:strVal val="visible"/>
+                                      </p:to>
+                                    </p:set>
+                                  </p:childTnLst>
+                                </p:cTn>
+                              </p:par>
+                              <p:par>
+                                <p:cTn id="7" presetID="1" presetClass="entr" presetSubtype="0" fill="hold" nodeType="withEffect">
+                                  <p:stCondLst>
+                                    <p:cond delay="0"/>
+                                  </p:stCondLst>
+                                  <p:childTnLst>
+                                    <p:set>
+                                      <p:cBhvr>
+                                        <p:cTn id="8" dur="1" fill="hold">
+                                          <p:stCondLst>
+                                            <p:cond delay="0"/>
+                                          </p:stCondLst>
+                                        </p:cTn>
+                                        <p:tgtEl>
+                                          <p:spTgt spid="6"/>
+                                        </p:tgtEl>
+                                        <p:attrNameLst>
+                                          <p:attrName>style.visibility</p:attrName>
+                                        </p:attrNameLst>
+                                      </p:cBhvr>
+                                      <p:to>
+                                        <p:strVal val="visible"/>
+                                      </p:to>
+                                    </p:set>
+                                  </p:childTnLst>
+                                </p:cTn>
+                              </p:par>
+                            </p:childTnLst>
+                          </p:cTn>
+                        </p:par>
+                      </p:childTnLst>
+                    </p:cTn>
+                  </p:par>
+                  <p:par>
+                    <p:cTn id="9" fill="hold">
+                      <p:stCondLst>
+                        <p:cond delay="indefinite"/>
+                      </p:stCondLst>
+                      <p:childTnLst>
+                        <p:par>
+                          <p:cTn id="10" fill="hold">
+                            <p:stCondLst>
+                              <p:cond delay="0"/>
+                            </p:stCondLst>
+                            <p:childTnLst>
+                              <p:par>
+                                <p:cTn id="11" presetID="1" presetClass="entr" presetSubtype="0" fill="hold" nodeType="clickEffect">
+                                  <p:stCondLst>
+                                    <p:cond delay="0"/>
+                                  </p:stCondLst>
+                                  <p:childTnLst>
+                                    <p:set>
+                                      <p:cBhvr>
+                                        <p:cTn id="12" dur="1" fill="hold">
+                                          <p:stCondLst>
+                                            <p:cond delay="0"/>
+                                          </p:stCondLst>
+                                        </p:cTn>
+                                        <p:tgtEl>
+                                          <p:spTgt spid="8"/>
+                                        </p:tgtEl>
+                                        <p:attrNameLst>
+                                          <p:attrName>style.visibility</p:attrName>
+                                        </p:attrNameLst>
+                                      </p:cBhvr>
+                                      <p:to>
+                                        <p:strVal val="visible"/>
+                                      </p:to>
+                                    </p:set>
+                                  </p:childTnLst>
+                                </p:cTn>
+                              </p:par>
+                              <p:par>
+                                <p:cTn id="13" presetID="1" presetClass="entr" presetSubtype="0" fill="hold" nodeType="withEffect">
+                                  <p:stCondLst>
+                                    <p:cond delay="0"/>
+                                  </p:stCondLst>
+                                  <p:childTnLst>
+                                    <p:set>
+                                      <p:cBhvr>
+                                        <p:cTn id="14" dur="1" fill="hold">
+                                          <p:stCondLst>
+                                            <p:cond delay="0"/>
+                                          </p:stCondLst>
+                                        </p:cTn>
+                                        <p:tgtEl>
+                                          <p:spTgt spid="14"/>
+                                        </p:tgtEl>
+                                        <p:attrNameLst>
+                                          <p:attrName>style.visibility</p:attrName>
+                                        </p:attrNameLst>
+                                      </p:cBhvr>
+                                      <p:to>
+                                        <p:strVal val="visible"/>
+                                      </p:to>
+                                    </p:set>
+                                  </p:childTnLst>
+                                </p:cTn>
+                              </p:par>
+                            </p:childTnLst>
+                          </p:cTn>
+                        </p:par>
+                      </p:childTnLst>
+                    </p:cTn>
+                  </p:par>
+                  <p:par>
+                    <p:cTn id="15" fill="hold">
+                      <p:stCondLst>
+                        <p:cond delay="indefinite"/>
+                      </p:stCondLst>
+                      <p:childTnLst>
+                        <p:par>
+                          <p:cTn id="16" fill="hold">
+                            <p:stCondLst>
+                              <p:cond delay="0"/>
+                            </p:stCondLst>
+                            <p:childTnLst>
+                              <p:par>
+                                <p:cTn id="17" presetID="1" presetClass="entr" presetSubtype="0" fill="hold" nodeType="clickEffect">
+                                  <p:stCondLst>
+                                    <p:cond delay="0"/>
+                                  </p:stCondLst>
+                                  <p:childTnLst>
+                                    <p:set>
+                                      <p:cBhvr>
+                                        <p:cTn id="18" dur="1" fill="hold">
+                                          <p:stCondLst>
+                                            <p:cond delay="0"/>
+                                          </p:stCondLst>
+                                        </p:cTn>
+                                        <p:tgtEl>
+                                          <p:spTgt spid="11"/>
+                                        </p:tgtEl>
+                                        <p:attrNameLst>
+                                          <p:attrName>style.visibility</p:attrName>
+                                        </p:attrNameLst>
+                                      </p:cBhvr>
+                                      <p:to>
+                                        <p:strVal val="visible"/>
+                                      </p:to>
+                                    </p:set>
+                                  </p:childTnLst>
+                                </p:cTn>
+                              </p:par>
+                              <p:par>
+                                <p:cTn id="19" presetID="1" presetClass="entr" presetSubtype="0" fill="hold" nodeType="withEffect">
+                                  <p:stCondLst>
+                                    <p:cond delay="0"/>
+                                  </p:stCondLst>
+                                  <p:childTnLst>
+                                    <p:set>
+                                      <p:cBhvr>
+                                        <p:cTn id="20" dur="1" fill="hold">
+                                          <p:stCondLst>
+                                            <p:cond delay="0"/>
+                                          </p:stCondLst>
+                                        </p:cTn>
+                                        <p:tgtEl>
+                                          <p:spTgt spid="16"/>
+                                        </p:tgtEl>
+                                        <p:attrNameLst>
+                                          <p:attrName>style.visibility</p:attrName>
+                                        </p:attrNameLst>
+                                      </p:cBhvr>
+                                      <p:to>
+                                        <p:strVal val="visible"/>
+                                      </p:to>
+                                    </p:set>
+                                  </p:childTnLst>
+                                </p:cTn>
+                              </p:par>
+                            </p:childTnLst>
+                          </p:cTn>
+                        </p:par>
+                      </p:childTnLst>
+                    </p:cTn>
+                  </p:par>
+                </p:childTnLst>
+              </p:cTn>
+              <p:prevCondLst>
+                <p:cond evt="onPrev" delay="0">
+                  <p:tgtEl>
+                    <p:sldTgt/>
+                  </p:tgtEl>
+                </p:cond>
+              </p:prevCondLst>
+              <p:nextCondLst>
+                <p:cond evt="onNext" delay="0">
+                  <p:tgtEl>
+                    <p:sldTgt/>
+                  </p:tgtEl>
+                </p:cond>
+              </p:nextCondLst>
+            </p:seq>
+          </p:childTnLst>
+        </p:cTn>
+      </p:par>
+    </p:tnLst>
+  </p:timing>
 </p:sld>
 </file>
 
@@ -7040,6 +9908,126 @@
   <p:clrMapOvr>
     <a:masterClrMapping/>
   </p:clrMapOvr>
+  <p:timing>
+    <p:tnLst>
+      <p:par>
+        <p:cTn id="1" dur="indefinite" restart="never" nodeType="tmRoot">
+          <p:childTnLst>
+            <p:seq concurrent="1" nextAc="seek">
+              <p:cTn id="2" dur="indefinite" nodeType="mainSeq">
+                <p:childTnLst>
+                  <p:par>
+                    <p:cTn id="3" fill="hold">
+                      <p:stCondLst>
+                        <p:cond delay="indefinite"/>
+                      </p:stCondLst>
+                      <p:childTnLst>
+                        <p:par>
+                          <p:cTn id="4" fill="hold">
+                            <p:stCondLst>
+                              <p:cond delay="0"/>
+                            </p:stCondLst>
+                            <p:childTnLst>
+                              <p:par>
+                                <p:cTn id="5" presetID="1" presetClass="entr" presetSubtype="0" fill="hold" nodeType="clickEffect">
+                                  <p:stCondLst>
+                                    <p:cond delay="0"/>
+                                  </p:stCondLst>
+                                  <p:childTnLst>
+                                    <p:set>
+                                      <p:cBhvr>
+                                        <p:cTn id="6" dur="1" fill="hold">
+                                          <p:stCondLst>
+                                            <p:cond delay="0"/>
+                                          </p:stCondLst>
+                                        </p:cTn>
+                                        <p:tgtEl>
+                                          <p:spTgt spid="5"/>
+                                        </p:tgtEl>
+                                        <p:attrNameLst>
+                                          <p:attrName>style.visibility</p:attrName>
+                                        </p:attrNameLst>
+                                      </p:cBhvr>
+                                      <p:to>
+                                        <p:strVal val="visible"/>
+                                      </p:to>
+                                    </p:set>
+                                  </p:childTnLst>
+                                </p:cTn>
+                              </p:par>
+                            </p:childTnLst>
+                          </p:cTn>
+                        </p:par>
+                      </p:childTnLst>
+                    </p:cTn>
+                  </p:par>
+                  <p:par>
+                    <p:cTn id="7" fill="hold">
+                      <p:stCondLst>
+                        <p:cond delay="indefinite"/>
+                      </p:stCondLst>
+                      <p:childTnLst>
+                        <p:par>
+                          <p:cTn id="8" fill="hold">
+                            <p:stCondLst>
+                              <p:cond delay="0"/>
+                            </p:stCondLst>
+                            <p:childTnLst>
+                              <p:par>
+                                <p:cTn id="9" presetID="1" presetClass="entr" presetSubtype="0" fill="hold" nodeType="clickEffect">
+                                  <p:stCondLst>
+                                    <p:cond delay="0"/>
+                                  </p:stCondLst>
+                                  <p:childTnLst>
+                                    <p:set>
+                                      <p:cBhvr>
+                                        <p:cTn id="10" dur="1" fill="hold">
+                                          <p:stCondLst>
+                                            <p:cond delay="0"/>
+                                          </p:stCondLst>
+                                        </p:cTn>
+                                        <p:tgtEl>
+                                          <p:spTgt spid="7"/>
+                                        </p:tgtEl>
+                                        <p:attrNameLst>
+                                          <p:attrName>style.visibility</p:attrName>
+                                        </p:attrNameLst>
+                                      </p:cBhvr>
+                                      <p:to>
+                                        <p:strVal val="visible"/>
+                                      </p:to>
+                                    </p:set>
+                                  </p:childTnLst>
+                                </p:cTn>
+                              </p:par>
+                            </p:childTnLst>
+                          </p:cTn>
+                        </p:par>
+                      </p:childTnLst>
+                    </p:cTn>
+                  </p:par>
+                </p:childTnLst>
+              </p:cTn>
+              <p:prevCondLst>
+                <p:cond evt="onPrev" delay="0">
+                  <p:tgtEl>
+                    <p:sldTgt/>
+                  </p:tgtEl>
+                </p:cond>
+              </p:prevCondLst>
+              <p:nextCondLst>
+                <p:cond evt="onNext" delay="0">
+                  <p:tgtEl>
+                    <p:sldTgt/>
+                  </p:tgtEl>
+                </p:cond>
+              </p:nextCondLst>
+            </p:seq>
+          </p:childTnLst>
+        </p:cTn>
+      </p:par>
+    </p:tnLst>
+  </p:timing>
 </p:sld>
 </file>
 
@@ -7196,7 +10184,7 @@
         </p:blipFill>
         <p:spPr>
           <a:xfrm>
-            <a:off x="2187706" y="3785616"/>
+            <a:off x="2187706" y="3805280"/>
             <a:ext cx="1245252" cy="539496"/>
           </a:xfrm>
           <a:prstGeom prst="rect">
@@ -7274,6 +10262,252 @@
   <p:clrMapOvr>
     <a:masterClrMapping/>
   </p:clrMapOvr>
+  <p:timing>
+    <p:tnLst>
+      <p:par>
+        <p:cTn id="1" dur="indefinite" restart="never" nodeType="tmRoot">
+          <p:childTnLst>
+            <p:seq concurrent="1" nextAc="seek">
+              <p:cTn id="2" dur="indefinite" nodeType="mainSeq">
+                <p:childTnLst>
+                  <p:par>
+                    <p:cTn id="3" fill="hold">
+                      <p:stCondLst>
+                        <p:cond delay="indefinite"/>
+                      </p:stCondLst>
+                      <p:childTnLst>
+                        <p:par>
+                          <p:cTn id="4" fill="hold">
+                            <p:stCondLst>
+                              <p:cond delay="0"/>
+                            </p:stCondLst>
+                            <p:childTnLst>
+                              <p:par>
+                                <p:cTn id="5" presetID="1" presetClass="entr" presetSubtype="0" fill="hold" nodeType="clickEffect">
+                                  <p:stCondLst>
+                                    <p:cond delay="0"/>
+                                  </p:stCondLst>
+                                  <p:childTnLst>
+                                    <p:set>
+                                      <p:cBhvr>
+                                        <p:cTn id="6" dur="1" fill="hold">
+                                          <p:stCondLst>
+                                            <p:cond delay="0"/>
+                                          </p:stCondLst>
+                                        </p:cTn>
+                                        <p:tgtEl>
+                                          <p:spTgt spid="6"/>
+                                        </p:tgtEl>
+                                        <p:attrNameLst>
+                                          <p:attrName>style.visibility</p:attrName>
+                                        </p:attrNameLst>
+                                      </p:cBhvr>
+                                      <p:to>
+                                        <p:strVal val="visible"/>
+                                      </p:to>
+                                    </p:set>
+                                  </p:childTnLst>
+                                </p:cTn>
+                              </p:par>
+                              <p:par>
+                                <p:cTn id="7" presetID="1" presetClass="entr" presetSubtype="0" fill="hold" nodeType="withEffect">
+                                  <p:stCondLst>
+                                    <p:cond delay="0"/>
+                                  </p:stCondLst>
+                                  <p:childTnLst>
+                                    <p:set>
+                                      <p:cBhvr>
+                                        <p:cTn id="8" dur="1" fill="hold">
+                                          <p:stCondLst>
+                                            <p:cond delay="0"/>
+                                          </p:stCondLst>
+                                        </p:cTn>
+                                        <p:tgtEl>
+                                          <p:spTgt spid="4"/>
+                                        </p:tgtEl>
+                                        <p:attrNameLst>
+                                          <p:attrName>style.visibility</p:attrName>
+                                        </p:attrNameLst>
+                                      </p:cBhvr>
+                                      <p:to>
+                                        <p:strVal val="visible"/>
+                                      </p:to>
+                                    </p:set>
+                                  </p:childTnLst>
+                                </p:cTn>
+                              </p:par>
+                            </p:childTnLst>
+                          </p:cTn>
+                        </p:par>
+                      </p:childTnLst>
+                    </p:cTn>
+                  </p:par>
+                  <p:par>
+                    <p:cTn id="9" fill="hold">
+                      <p:stCondLst>
+                        <p:cond delay="indefinite"/>
+                      </p:stCondLst>
+                      <p:childTnLst>
+                        <p:par>
+                          <p:cTn id="10" fill="hold">
+                            <p:stCondLst>
+                              <p:cond delay="0"/>
+                            </p:stCondLst>
+                            <p:childTnLst>
+                              <p:par>
+                                <p:cTn id="11" presetID="1" presetClass="entr" presetSubtype="0" fill="hold" nodeType="clickEffect">
+                                  <p:stCondLst>
+                                    <p:cond delay="0"/>
+                                  </p:stCondLst>
+                                  <p:childTnLst>
+                                    <p:set>
+                                      <p:cBhvr>
+                                        <p:cTn id="12" dur="1" fill="hold">
+                                          <p:stCondLst>
+                                            <p:cond delay="0"/>
+                                          </p:stCondLst>
+                                        </p:cTn>
+                                        <p:tgtEl>
+                                          <p:spTgt spid="7"/>
+                                        </p:tgtEl>
+                                        <p:attrNameLst>
+                                          <p:attrName>style.visibility</p:attrName>
+                                        </p:attrNameLst>
+                                      </p:cBhvr>
+                                      <p:to>
+                                        <p:strVal val="visible"/>
+                                      </p:to>
+                                    </p:set>
+                                  </p:childTnLst>
+                                </p:cTn>
+                              </p:par>
+                              <p:par>
+                                <p:cTn id="13" presetID="1" presetClass="entr" presetSubtype="0" fill="hold" nodeType="withEffect">
+                                  <p:stCondLst>
+                                    <p:cond delay="0"/>
+                                  </p:stCondLst>
+                                  <p:childTnLst>
+                                    <p:set>
+                                      <p:cBhvr>
+                                        <p:cTn id="14" dur="1" fill="hold">
+                                          <p:stCondLst>
+                                            <p:cond delay="0"/>
+                                          </p:stCondLst>
+                                        </p:cTn>
+                                        <p:tgtEl>
+                                          <p:spTgt spid="14"/>
+                                        </p:tgtEl>
+                                        <p:attrNameLst>
+                                          <p:attrName>style.visibility</p:attrName>
+                                        </p:attrNameLst>
+                                      </p:cBhvr>
+                                      <p:to>
+                                        <p:strVal val="visible"/>
+                                      </p:to>
+                                    </p:set>
+                                  </p:childTnLst>
+                                </p:cTn>
+                              </p:par>
+                            </p:childTnLst>
+                          </p:cTn>
+                        </p:par>
+                      </p:childTnLst>
+                    </p:cTn>
+                  </p:par>
+                  <p:par>
+                    <p:cTn id="15" fill="hold">
+                      <p:stCondLst>
+                        <p:cond delay="indefinite"/>
+                      </p:stCondLst>
+                      <p:childTnLst>
+                        <p:par>
+                          <p:cTn id="16" fill="hold">
+                            <p:stCondLst>
+                              <p:cond delay="0"/>
+                            </p:stCondLst>
+                            <p:childTnLst>
+                              <p:par>
+                                <p:cTn id="17" presetID="1" presetClass="entr" presetSubtype="0" fill="hold" nodeType="clickEffect">
+                                  <p:stCondLst>
+                                    <p:cond delay="0"/>
+                                  </p:stCondLst>
+                                  <p:childTnLst>
+                                    <p:set>
+                                      <p:cBhvr>
+                                        <p:cTn id="18" dur="1" fill="hold">
+                                          <p:stCondLst>
+                                            <p:cond delay="0"/>
+                                          </p:stCondLst>
+                                        </p:cTn>
+                                        <p:tgtEl>
+                                          <p:spTgt spid="10"/>
+                                        </p:tgtEl>
+                                        <p:attrNameLst>
+                                          <p:attrName>style.visibility</p:attrName>
+                                        </p:attrNameLst>
+                                      </p:cBhvr>
+                                      <p:to>
+                                        <p:strVal val="visible"/>
+                                      </p:to>
+                                    </p:set>
+                                  </p:childTnLst>
+                                </p:cTn>
+                              </p:par>
+                              <p:par>
+                                <p:cTn id="19" presetID="1" presetClass="entr" presetSubtype="0" fill="hold" nodeType="withEffect">
+                                  <p:stCondLst>
+                                    <p:cond delay="0"/>
+                                  </p:stCondLst>
+                                  <p:childTnLst>
+                                    <p:set>
+                                      <p:cBhvr>
+                                        <p:cTn id="20" dur="1" fill="hold">
+                                          <p:stCondLst>
+                                            <p:cond delay="0"/>
+                                          </p:stCondLst>
+                                        </p:cTn>
+                                        <p:tgtEl>
+                                          <p:spTgt spid="16"/>
+                                        </p:tgtEl>
+                                        <p:attrNameLst>
+                                          <p:attrName>style.visibility</p:attrName>
+                                        </p:attrNameLst>
+                                      </p:cBhvr>
+                                      <p:to>
+                                        <p:strVal val="visible"/>
+                                      </p:to>
+                                    </p:set>
+                                  </p:childTnLst>
+                                </p:cTn>
+                              </p:par>
+                            </p:childTnLst>
+                          </p:cTn>
+                        </p:par>
+                      </p:childTnLst>
+                    </p:cTn>
+                  </p:par>
+                </p:childTnLst>
+              </p:cTn>
+              <p:prevCondLst>
+                <p:cond evt="onPrev" delay="0">
+                  <p:tgtEl>
+                    <p:sldTgt/>
+                  </p:tgtEl>
+                </p:cond>
+              </p:prevCondLst>
+              <p:nextCondLst>
+                <p:cond evt="onNext" delay="0">
+                  <p:tgtEl>
+                    <p:sldTgt/>
+                  </p:tgtEl>
+                </p:cond>
+              </p:nextCondLst>
+            </p:seq>
+          </p:childTnLst>
+        </p:cTn>
+      </p:par>
+    </p:tnLst>
+  </p:timing>
 </p:sld>
 </file>
 
@@ -7354,12 +10588,6 @@
               <a:t>This is true for all subsets</a:t>
             </a:r>
           </a:p>
-          <a:p>
-            <a:r>
-              <a:rPr lang="en-AU" dirty="0"/>
-              <a:t>Based on the 95% CI only for now</a:t>
-            </a:r>
-          </a:p>
         </p:txBody>
       </p:sp>
     </p:spTree>
@@ -7372,6 +10600,134 @@
   <p:clrMapOvr>
     <a:masterClrMapping/>
   </p:clrMapOvr>
+  <p:timing>
+    <p:tnLst>
+      <p:par>
+        <p:cTn id="1" dur="indefinite" restart="never" nodeType="tmRoot">
+          <p:childTnLst>
+            <p:seq concurrent="1" nextAc="seek">
+              <p:cTn id="2" dur="indefinite" nodeType="mainSeq">
+                <p:childTnLst>
+                  <p:par>
+                    <p:cTn id="3" fill="hold">
+                      <p:stCondLst>
+                        <p:cond delay="indefinite"/>
+                      </p:stCondLst>
+                      <p:childTnLst>
+                        <p:par>
+                          <p:cTn id="4" fill="hold">
+                            <p:stCondLst>
+                              <p:cond delay="0"/>
+                            </p:stCondLst>
+                            <p:childTnLst>
+                              <p:par>
+                                <p:cTn id="5" presetID="1" presetClass="entr" presetSubtype="0" fill="hold" nodeType="clickEffect">
+                                  <p:stCondLst>
+                                    <p:cond delay="0"/>
+                                  </p:stCondLst>
+                                  <p:childTnLst>
+                                    <p:set>
+                                      <p:cBhvr>
+                                        <p:cTn id="6" dur="1" fill="hold">
+                                          <p:stCondLst>
+                                            <p:cond delay="0"/>
+                                          </p:stCondLst>
+                                        </p:cTn>
+                                        <p:tgtEl>
+                                          <p:spTgt spid="3">
+                                            <p:txEl>
+                                              <p:pRg st="0" end="0"/>
+                                            </p:txEl>
+                                          </p:spTgt>
+                                        </p:tgtEl>
+                                        <p:attrNameLst>
+                                          <p:attrName>style.visibility</p:attrName>
+                                        </p:attrNameLst>
+                                      </p:cBhvr>
+                                      <p:to>
+                                        <p:strVal val="visible"/>
+                                      </p:to>
+                                    </p:set>
+                                  </p:childTnLst>
+                                </p:cTn>
+                              </p:par>
+                            </p:childTnLst>
+                          </p:cTn>
+                        </p:par>
+                      </p:childTnLst>
+                    </p:cTn>
+                  </p:par>
+                  <p:par>
+                    <p:cTn id="7" fill="hold">
+                      <p:stCondLst>
+                        <p:cond delay="indefinite"/>
+                      </p:stCondLst>
+                      <p:childTnLst>
+                        <p:par>
+                          <p:cTn id="8" fill="hold">
+                            <p:stCondLst>
+                              <p:cond delay="0"/>
+                            </p:stCondLst>
+                            <p:childTnLst>
+                              <p:par>
+                                <p:cTn id="9" presetID="1" presetClass="entr" presetSubtype="0" fill="hold" nodeType="clickEffect">
+                                  <p:stCondLst>
+                                    <p:cond delay="0"/>
+                                  </p:stCondLst>
+                                  <p:childTnLst>
+                                    <p:set>
+                                      <p:cBhvr>
+                                        <p:cTn id="10" dur="1" fill="hold">
+                                          <p:stCondLst>
+                                            <p:cond delay="0"/>
+                                          </p:stCondLst>
+                                        </p:cTn>
+                                        <p:tgtEl>
+                                          <p:spTgt spid="3">
+                                            <p:txEl>
+                                              <p:pRg st="1" end="1"/>
+                                            </p:txEl>
+                                          </p:spTgt>
+                                        </p:tgtEl>
+                                        <p:attrNameLst>
+                                          <p:attrName>style.visibility</p:attrName>
+                                        </p:attrNameLst>
+                                      </p:cBhvr>
+                                      <p:to>
+                                        <p:strVal val="visible"/>
+                                      </p:to>
+                                    </p:set>
+                                  </p:childTnLst>
+                                </p:cTn>
+                              </p:par>
+                            </p:childTnLst>
+                          </p:cTn>
+                        </p:par>
+                      </p:childTnLst>
+                    </p:cTn>
+                  </p:par>
+                </p:childTnLst>
+              </p:cTn>
+              <p:prevCondLst>
+                <p:cond evt="onPrev" delay="0">
+                  <p:tgtEl>
+                    <p:sldTgt/>
+                  </p:tgtEl>
+                </p:cond>
+              </p:prevCondLst>
+              <p:nextCondLst>
+                <p:cond evt="onNext" delay="0">
+                  <p:tgtEl>
+                    <p:sldTgt/>
+                  </p:tgtEl>
+                </p:cond>
+              </p:nextCondLst>
+            </p:seq>
+          </p:childTnLst>
+        </p:cTn>
+      </p:par>
+    </p:tnLst>
+  </p:timing>
 </p:sld>
 </file>
 
